--- a/public/fun/pack/pptx/review/보장점검양식_02_부부점검_입춘날마루.pptx
+++ b/public/fun/pack/pptx/review/보장점검양식_02_부부점검_입춘날마루.pptx
@@ -3347,7 +3347,7 @@
             <a:r>
               <a:rPr sz="3600" b="1" i="0">
                 <a:solidFill>
-                  <a:srgbClr val="74591B"/>
+                  <a:srgbClr val="72591D"/>
                 </a:solidFill>
               </a:rPr>
               <a:t>우리 보험 점검 시간</a:t>
@@ -3385,7 +3385,7 @@
             <a:r>
               <a:rPr sz="1700" b="0" i="1">
                 <a:solidFill>
-                  <a:srgbClr val="74591B"/>
+                  <a:srgbClr val="72591D"/>
                 </a:solidFill>
               </a:rPr>
               <a:t>부부가 각자 든 보험을 나란히 적어 봅니다</a:t>
@@ -3460,7 +3460,7 @@
     <p:bg>
       <p:bgPr>
         <a:solidFill>
-          <a:srgbClr val="FBF7EE"/>
+          <a:srgbClr val="FCF9F3"/>
         </a:solidFill>
         <a:effectLst/>
       </p:bgPr>
@@ -3489,7 +3489,7 @@
           <a:noFill/>
           <a:ln w="28575">
             <a:solidFill>
-              <a:srgbClr val="C6992F"/>
+              <a:srgbClr val="DFAD3A"/>
             </a:solidFill>
           </a:ln>
         </p:spPr>
@@ -3518,7 +3518,7 @@
           <a:noFill/>
           <a:ln w="9525">
             <a:solidFill>
-              <a:srgbClr val="F5E9CC"/>
+              <a:srgbClr val="F7EDD4"/>
             </a:solidFill>
           </a:ln>
         </p:spPr>
@@ -3560,7 +3560,7 @@
             <a:r>
               <a:rPr sz="3000" b="1" i="0">
                 <a:solidFill>
-                  <a:srgbClr val="74591B"/>
+                  <a:srgbClr val="72591D"/>
                 </a:solidFill>
               </a:rPr>
               <a:t>점검 대상 현황</a:t>
@@ -3611,30 +3611,30 @@
                   <a:tcPr anchor="ctr" marL="73152" marR="73152">
                     <a:lnL w="9525" cap="flat" cmpd="sng" algn="ctr">
                       <a:solidFill>
-                        <a:srgbClr val="C6992F"/>
+                        <a:srgbClr val="DFAD3A"/>
                       </a:solidFill>
                       <a:prstDash val="solid"/>
                     </a:lnL>
                     <a:lnR w="9525" cap="flat" cmpd="sng" algn="ctr">
                       <a:solidFill>
-                        <a:srgbClr val="C6992F"/>
+                        <a:srgbClr val="DFAD3A"/>
                       </a:solidFill>
                       <a:prstDash val="solid"/>
                     </a:lnR>
                     <a:lnT w="9525" cap="flat" cmpd="sng" algn="ctr">
                       <a:solidFill>
-                        <a:srgbClr val="C6992F"/>
+                        <a:srgbClr val="DFAD3A"/>
                       </a:solidFill>
                       <a:prstDash val="solid"/>
                     </a:lnT>
                     <a:lnB w="9525" cap="flat" cmpd="sng" algn="ctr">
                       <a:solidFill>
-                        <a:srgbClr val="C6992F"/>
+                        <a:srgbClr val="DFAD3A"/>
                       </a:solidFill>
                       <a:prstDash val="solid"/>
                     </a:lnB>
                     <a:solidFill>
-                      <a:srgbClr val="C6992F"/>
+                      <a:srgbClr val="DFAD3A"/>
                     </a:solidFill>
                   </a:tcPr>
                 </a:tc>
@@ -3657,30 +3657,30 @@
                   <a:tcPr anchor="ctr" marL="73152" marR="73152">
                     <a:lnL w="9525" cap="flat" cmpd="sng" algn="ctr">
                       <a:solidFill>
-                        <a:srgbClr val="C6992F"/>
+                        <a:srgbClr val="DFAD3A"/>
                       </a:solidFill>
                       <a:prstDash val="solid"/>
                     </a:lnL>
                     <a:lnR w="9525" cap="flat" cmpd="sng" algn="ctr">
                       <a:solidFill>
-                        <a:srgbClr val="C6992F"/>
+                        <a:srgbClr val="DFAD3A"/>
                       </a:solidFill>
                       <a:prstDash val="solid"/>
                     </a:lnR>
                     <a:lnT w="9525" cap="flat" cmpd="sng" algn="ctr">
                       <a:solidFill>
-                        <a:srgbClr val="C6992F"/>
+                        <a:srgbClr val="DFAD3A"/>
                       </a:solidFill>
                       <a:prstDash val="solid"/>
                     </a:lnT>
                     <a:lnB w="9525" cap="flat" cmpd="sng" algn="ctr">
                       <a:solidFill>
-                        <a:srgbClr val="C6992F"/>
+                        <a:srgbClr val="DFAD3A"/>
                       </a:solidFill>
                       <a:prstDash val="solid"/>
                     </a:lnB>
                     <a:solidFill>
-                      <a:srgbClr val="C6992F"/>
+                      <a:srgbClr val="DFAD3A"/>
                     </a:solidFill>
                   </a:tcPr>
                 </a:tc>
@@ -3703,30 +3703,30 @@
                   <a:tcPr anchor="ctr" marL="73152" marR="73152">
                     <a:lnL w="9525" cap="flat" cmpd="sng" algn="ctr">
                       <a:solidFill>
-                        <a:srgbClr val="C6992F"/>
+                        <a:srgbClr val="DFAD3A"/>
                       </a:solidFill>
                       <a:prstDash val="solid"/>
                     </a:lnL>
                     <a:lnR w="9525" cap="flat" cmpd="sng" algn="ctr">
                       <a:solidFill>
-                        <a:srgbClr val="C6992F"/>
+                        <a:srgbClr val="DFAD3A"/>
                       </a:solidFill>
                       <a:prstDash val="solid"/>
                     </a:lnR>
                     <a:lnT w="9525" cap="flat" cmpd="sng" algn="ctr">
                       <a:solidFill>
-                        <a:srgbClr val="C6992F"/>
+                        <a:srgbClr val="DFAD3A"/>
                       </a:solidFill>
                       <a:prstDash val="solid"/>
                     </a:lnT>
                     <a:lnB w="9525" cap="flat" cmpd="sng" algn="ctr">
                       <a:solidFill>
-                        <a:srgbClr val="C6992F"/>
+                        <a:srgbClr val="DFAD3A"/>
                       </a:solidFill>
                       <a:prstDash val="solid"/>
                     </a:lnB>
                     <a:solidFill>
-                      <a:srgbClr val="C6992F"/>
+                      <a:srgbClr val="DFAD3A"/>
                     </a:solidFill>
                   </a:tcPr>
                 </a:tc>
@@ -3741,7 +3741,7 @@
                       <a:r>
                         <a:rPr sz="1600" b="1">
                           <a:solidFill>
-                            <a:srgbClr val="74591B"/>
+                            <a:srgbClr val="72591D"/>
                           </a:solidFill>
                         </a:rPr>
                         <a:t>이름</a:t>
@@ -3751,30 +3751,30 @@
                   <a:tcPr anchor="ctr" marL="73152" marR="73152">
                     <a:lnL w="9525" cap="flat" cmpd="sng" algn="ctr">
                       <a:solidFill>
-                        <a:srgbClr val="F5E9CC"/>
+                        <a:srgbClr val="F7EDD4"/>
                       </a:solidFill>
                       <a:prstDash val="solid"/>
                     </a:lnL>
                     <a:lnR w="9525" cap="flat" cmpd="sng" algn="ctr">
                       <a:solidFill>
-                        <a:srgbClr val="F5E9CC"/>
+                        <a:srgbClr val="F7EDD4"/>
                       </a:solidFill>
                       <a:prstDash val="solid"/>
                     </a:lnR>
                     <a:lnT w="9525" cap="flat" cmpd="sng" algn="ctr">
                       <a:solidFill>
-                        <a:srgbClr val="F5E9CC"/>
+                        <a:srgbClr val="F7EDD4"/>
                       </a:solidFill>
                       <a:prstDash val="solid"/>
                     </a:lnT>
                     <a:lnB w="9525" cap="flat" cmpd="sng" algn="ctr">
                       <a:solidFill>
-                        <a:srgbClr val="F5E9CC"/>
+                        <a:srgbClr val="F7EDD4"/>
                       </a:solidFill>
                       <a:prstDash val="solid"/>
                     </a:lnB>
                     <a:solidFill>
-                      <a:srgbClr val="F5E9CC"/>
+                      <a:srgbClr val="F7EDD4"/>
                     </a:solidFill>
                   </a:tcPr>
                 </a:tc>
@@ -3797,25 +3797,25 @@
                   <a:tcPr anchor="ctr" marL="73152" marR="73152">
                     <a:lnL w="9525" cap="flat" cmpd="sng" algn="ctr">
                       <a:solidFill>
-                        <a:srgbClr val="F5E9CC"/>
+                        <a:srgbClr val="F7EDD4"/>
                       </a:solidFill>
                       <a:prstDash val="solid"/>
                     </a:lnL>
                     <a:lnR w="9525" cap="flat" cmpd="sng" algn="ctr">
                       <a:solidFill>
-                        <a:srgbClr val="F5E9CC"/>
+                        <a:srgbClr val="F7EDD4"/>
                       </a:solidFill>
                       <a:prstDash val="solid"/>
                     </a:lnR>
                     <a:lnT w="9525" cap="flat" cmpd="sng" algn="ctr">
                       <a:solidFill>
-                        <a:srgbClr val="F5E9CC"/>
+                        <a:srgbClr val="F7EDD4"/>
                       </a:solidFill>
                       <a:prstDash val="solid"/>
                     </a:lnT>
                     <a:lnB w="9525" cap="flat" cmpd="sng" algn="ctr">
                       <a:solidFill>
-                        <a:srgbClr val="F5E9CC"/>
+                        <a:srgbClr val="F7EDD4"/>
                       </a:solidFill>
                       <a:prstDash val="solid"/>
                     </a:lnB>
@@ -3843,25 +3843,25 @@
                   <a:tcPr anchor="ctr" marL="73152" marR="73152">
                     <a:lnL w="9525" cap="flat" cmpd="sng" algn="ctr">
                       <a:solidFill>
-                        <a:srgbClr val="F5E9CC"/>
+                        <a:srgbClr val="F7EDD4"/>
                       </a:solidFill>
                       <a:prstDash val="solid"/>
                     </a:lnL>
                     <a:lnR w="9525" cap="flat" cmpd="sng" algn="ctr">
                       <a:solidFill>
-                        <a:srgbClr val="F5E9CC"/>
+                        <a:srgbClr val="F7EDD4"/>
                       </a:solidFill>
                       <a:prstDash val="solid"/>
                     </a:lnR>
                     <a:lnT w="9525" cap="flat" cmpd="sng" algn="ctr">
                       <a:solidFill>
-                        <a:srgbClr val="F5E9CC"/>
+                        <a:srgbClr val="F7EDD4"/>
                       </a:solidFill>
                       <a:prstDash val="solid"/>
                     </a:lnT>
                     <a:lnB w="9525" cap="flat" cmpd="sng" algn="ctr">
                       <a:solidFill>
-                        <a:srgbClr val="F5E9CC"/>
+                        <a:srgbClr val="F7EDD4"/>
                       </a:solidFill>
                       <a:prstDash val="solid"/>
                     </a:lnB>
@@ -3881,7 +3881,7 @@
                       <a:r>
                         <a:rPr sz="1600" b="1">
                           <a:solidFill>
-                            <a:srgbClr val="74591B"/>
+                            <a:srgbClr val="72591D"/>
                           </a:solidFill>
                         </a:rPr>
                         <a:t>나이</a:t>
@@ -3891,30 +3891,30 @@
                   <a:tcPr anchor="ctr" marL="73152" marR="73152">
                     <a:lnL w="9525" cap="flat" cmpd="sng" algn="ctr">
                       <a:solidFill>
-                        <a:srgbClr val="F5E9CC"/>
+                        <a:srgbClr val="F7EDD4"/>
                       </a:solidFill>
                       <a:prstDash val="solid"/>
                     </a:lnL>
                     <a:lnR w="9525" cap="flat" cmpd="sng" algn="ctr">
                       <a:solidFill>
-                        <a:srgbClr val="F5E9CC"/>
+                        <a:srgbClr val="F7EDD4"/>
                       </a:solidFill>
                       <a:prstDash val="solid"/>
                     </a:lnR>
                     <a:lnT w="9525" cap="flat" cmpd="sng" algn="ctr">
                       <a:solidFill>
-                        <a:srgbClr val="F5E9CC"/>
+                        <a:srgbClr val="F7EDD4"/>
                       </a:solidFill>
                       <a:prstDash val="solid"/>
                     </a:lnT>
                     <a:lnB w="9525" cap="flat" cmpd="sng" algn="ctr">
                       <a:solidFill>
-                        <a:srgbClr val="F5E9CC"/>
+                        <a:srgbClr val="F7EDD4"/>
                       </a:solidFill>
                       <a:prstDash val="solid"/>
                     </a:lnB>
                     <a:solidFill>
-                      <a:srgbClr val="F5E9CC"/>
+                      <a:srgbClr val="F7EDD4"/>
                     </a:solidFill>
                   </a:tcPr>
                 </a:tc>
@@ -3937,30 +3937,30 @@
                   <a:tcPr anchor="ctr" marL="73152" marR="73152">
                     <a:lnL w="9525" cap="flat" cmpd="sng" algn="ctr">
                       <a:solidFill>
-                        <a:srgbClr val="F5E9CC"/>
+                        <a:srgbClr val="F7EDD4"/>
                       </a:solidFill>
                       <a:prstDash val="solid"/>
                     </a:lnL>
                     <a:lnR w="9525" cap="flat" cmpd="sng" algn="ctr">
                       <a:solidFill>
-                        <a:srgbClr val="F5E9CC"/>
+                        <a:srgbClr val="F7EDD4"/>
                       </a:solidFill>
                       <a:prstDash val="solid"/>
                     </a:lnR>
                     <a:lnT w="9525" cap="flat" cmpd="sng" algn="ctr">
                       <a:solidFill>
-                        <a:srgbClr val="F5E9CC"/>
+                        <a:srgbClr val="F7EDD4"/>
                       </a:solidFill>
                       <a:prstDash val="solid"/>
                     </a:lnT>
                     <a:lnB w="9525" cap="flat" cmpd="sng" algn="ctr">
                       <a:solidFill>
-                        <a:srgbClr val="F5E9CC"/>
+                        <a:srgbClr val="F7EDD4"/>
                       </a:solidFill>
                       <a:prstDash val="solid"/>
                     </a:lnB>
                     <a:solidFill>
-                      <a:srgbClr val="FBF7EE"/>
+                      <a:srgbClr val="FCF9F3"/>
                     </a:solidFill>
                   </a:tcPr>
                 </a:tc>
@@ -3983,30 +3983,30 @@
                   <a:tcPr anchor="ctr" marL="73152" marR="73152">
                     <a:lnL w="9525" cap="flat" cmpd="sng" algn="ctr">
                       <a:solidFill>
-                        <a:srgbClr val="F5E9CC"/>
+                        <a:srgbClr val="F7EDD4"/>
                       </a:solidFill>
                       <a:prstDash val="solid"/>
                     </a:lnL>
                     <a:lnR w="9525" cap="flat" cmpd="sng" algn="ctr">
                       <a:solidFill>
-                        <a:srgbClr val="F5E9CC"/>
+                        <a:srgbClr val="F7EDD4"/>
                       </a:solidFill>
                       <a:prstDash val="solid"/>
                     </a:lnR>
                     <a:lnT w="9525" cap="flat" cmpd="sng" algn="ctr">
                       <a:solidFill>
-                        <a:srgbClr val="F5E9CC"/>
+                        <a:srgbClr val="F7EDD4"/>
                       </a:solidFill>
                       <a:prstDash val="solid"/>
                     </a:lnT>
                     <a:lnB w="9525" cap="flat" cmpd="sng" algn="ctr">
                       <a:solidFill>
-                        <a:srgbClr val="F5E9CC"/>
+                        <a:srgbClr val="F7EDD4"/>
                       </a:solidFill>
                       <a:prstDash val="solid"/>
                     </a:lnB>
                     <a:solidFill>
-                      <a:srgbClr val="FBF7EE"/>
+                      <a:srgbClr val="FCF9F3"/>
                     </a:solidFill>
                   </a:tcPr>
                 </a:tc>
@@ -4021,7 +4021,7 @@
                       <a:r>
                         <a:rPr sz="1600" b="1">
                           <a:solidFill>
-                            <a:srgbClr val="74591B"/>
+                            <a:srgbClr val="72591D"/>
                           </a:solidFill>
                         </a:rPr>
                         <a:t>직업</a:t>
@@ -4031,30 +4031,30 @@
                   <a:tcPr anchor="ctr" marL="73152" marR="73152">
                     <a:lnL w="9525" cap="flat" cmpd="sng" algn="ctr">
                       <a:solidFill>
-                        <a:srgbClr val="F5E9CC"/>
+                        <a:srgbClr val="F7EDD4"/>
                       </a:solidFill>
                       <a:prstDash val="solid"/>
                     </a:lnL>
                     <a:lnR w="9525" cap="flat" cmpd="sng" algn="ctr">
                       <a:solidFill>
-                        <a:srgbClr val="F5E9CC"/>
+                        <a:srgbClr val="F7EDD4"/>
                       </a:solidFill>
                       <a:prstDash val="solid"/>
                     </a:lnR>
                     <a:lnT w="9525" cap="flat" cmpd="sng" algn="ctr">
                       <a:solidFill>
-                        <a:srgbClr val="F5E9CC"/>
+                        <a:srgbClr val="F7EDD4"/>
                       </a:solidFill>
                       <a:prstDash val="solid"/>
                     </a:lnT>
                     <a:lnB w="9525" cap="flat" cmpd="sng" algn="ctr">
                       <a:solidFill>
-                        <a:srgbClr val="F5E9CC"/>
+                        <a:srgbClr val="F7EDD4"/>
                       </a:solidFill>
                       <a:prstDash val="solid"/>
                     </a:lnB>
                     <a:solidFill>
-                      <a:srgbClr val="F5E9CC"/>
+                      <a:srgbClr val="F7EDD4"/>
                     </a:solidFill>
                   </a:tcPr>
                 </a:tc>
@@ -4077,25 +4077,25 @@
                   <a:tcPr anchor="ctr" marL="73152" marR="73152">
                     <a:lnL w="9525" cap="flat" cmpd="sng" algn="ctr">
                       <a:solidFill>
-                        <a:srgbClr val="F5E9CC"/>
+                        <a:srgbClr val="F7EDD4"/>
                       </a:solidFill>
                       <a:prstDash val="solid"/>
                     </a:lnL>
                     <a:lnR w="9525" cap="flat" cmpd="sng" algn="ctr">
                       <a:solidFill>
-                        <a:srgbClr val="F5E9CC"/>
+                        <a:srgbClr val="F7EDD4"/>
                       </a:solidFill>
                       <a:prstDash val="solid"/>
                     </a:lnR>
                     <a:lnT w="9525" cap="flat" cmpd="sng" algn="ctr">
                       <a:solidFill>
-                        <a:srgbClr val="F5E9CC"/>
+                        <a:srgbClr val="F7EDD4"/>
                       </a:solidFill>
                       <a:prstDash val="solid"/>
                     </a:lnT>
                     <a:lnB w="9525" cap="flat" cmpd="sng" algn="ctr">
                       <a:solidFill>
-                        <a:srgbClr val="F5E9CC"/>
+                        <a:srgbClr val="F7EDD4"/>
                       </a:solidFill>
                       <a:prstDash val="solid"/>
                     </a:lnB>
@@ -4123,25 +4123,25 @@
                   <a:tcPr anchor="ctr" marL="73152" marR="73152">
                     <a:lnL w="9525" cap="flat" cmpd="sng" algn="ctr">
                       <a:solidFill>
-                        <a:srgbClr val="F5E9CC"/>
+                        <a:srgbClr val="F7EDD4"/>
                       </a:solidFill>
                       <a:prstDash val="solid"/>
                     </a:lnL>
                     <a:lnR w="9525" cap="flat" cmpd="sng" algn="ctr">
                       <a:solidFill>
-                        <a:srgbClr val="F5E9CC"/>
+                        <a:srgbClr val="F7EDD4"/>
                       </a:solidFill>
                       <a:prstDash val="solid"/>
                     </a:lnR>
                     <a:lnT w="9525" cap="flat" cmpd="sng" algn="ctr">
                       <a:solidFill>
-                        <a:srgbClr val="F5E9CC"/>
+                        <a:srgbClr val="F7EDD4"/>
                       </a:solidFill>
                       <a:prstDash val="solid"/>
                     </a:lnT>
                     <a:lnB w="9525" cap="flat" cmpd="sng" algn="ctr">
                       <a:solidFill>
-                        <a:srgbClr val="F5E9CC"/>
+                        <a:srgbClr val="F7EDD4"/>
                       </a:solidFill>
                       <a:prstDash val="solid"/>
                     </a:lnB>
@@ -4161,7 +4161,7 @@
                       <a:r>
                         <a:rPr sz="1600" b="1">
                           <a:solidFill>
-                            <a:srgbClr val="74591B"/>
+                            <a:srgbClr val="72591D"/>
                           </a:solidFill>
                         </a:rPr>
                         <a:t>건강 상태 메모</a:t>
@@ -4171,30 +4171,30 @@
                   <a:tcPr anchor="ctr" marL="73152" marR="73152">
                     <a:lnL w="9525" cap="flat" cmpd="sng" algn="ctr">
                       <a:solidFill>
-                        <a:srgbClr val="F5E9CC"/>
+                        <a:srgbClr val="F7EDD4"/>
                       </a:solidFill>
                       <a:prstDash val="solid"/>
                     </a:lnL>
                     <a:lnR w="9525" cap="flat" cmpd="sng" algn="ctr">
                       <a:solidFill>
-                        <a:srgbClr val="F5E9CC"/>
+                        <a:srgbClr val="F7EDD4"/>
                       </a:solidFill>
                       <a:prstDash val="solid"/>
                     </a:lnR>
                     <a:lnT w="9525" cap="flat" cmpd="sng" algn="ctr">
                       <a:solidFill>
-                        <a:srgbClr val="F5E9CC"/>
+                        <a:srgbClr val="F7EDD4"/>
                       </a:solidFill>
                       <a:prstDash val="solid"/>
                     </a:lnT>
                     <a:lnB w="9525" cap="flat" cmpd="sng" algn="ctr">
                       <a:solidFill>
-                        <a:srgbClr val="F5E9CC"/>
+                        <a:srgbClr val="F7EDD4"/>
                       </a:solidFill>
                       <a:prstDash val="solid"/>
                     </a:lnB>
                     <a:solidFill>
-                      <a:srgbClr val="F5E9CC"/>
+                      <a:srgbClr val="F7EDD4"/>
                     </a:solidFill>
                   </a:tcPr>
                 </a:tc>
@@ -4217,30 +4217,30 @@
                   <a:tcPr anchor="ctr" marL="73152" marR="73152">
                     <a:lnL w="9525" cap="flat" cmpd="sng" algn="ctr">
                       <a:solidFill>
-                        <a:srgbClr val="F5E9CC"/>
+                        <a:srgbClr val="F7EDD4"/>
                       </a:solidFill>
                       <a:prstDash val="solid"/>
                     </a:lnL>
                     <a:lnR w="9525" cap="flat" cmpd="sng" algn="ctr">
                       <a:solidFill>
-                        <a:srgbClr val="F5E9CC"/>
+                        <a:srgbClr val="F7EDD4"/>
                       </a:solidFill>
                       <a:prstDash val="solid"/>
                     </a:lnR>
                     <a:lnT w="9525" cap="flat" cmpd="sng" algn="ctr">
                       <a:solidFill>
-                        <a:srgbClr val="F5E9CC"/>
+                        <a:srgbClr val="F7EDD4"/>
                       </a:solidFill>
                       <a:prstDash val="solid"/>
                     </a:lnT>
                     <a:lnB w="9525" cap="flat" cmpd="sng" algn="ctr">
                       <a:solidFill>
-                        <a:srgbClr val="F5E9CC"/>
+                        <a:srgbClr val="F7EDD4"/>
                       </a:solidFill>
                       <a:prstDash val="solid"/>
                     </a:lnB>
                     <a:solidFill>
-                      <a:srgbClr val="FBF7EE"/>
+                      <a:srgbClr val="FCF9F3"/>
                     </a:solidFill>
                   </a:tcPr>
                 </a:tc>
@@ -4263,30 +4263,30 @@
                   <a:tcPr anchor="ctr" marL="73152" marR="73152">
                     <a:lnL w="9525" cap="flat" cmpd="sng" algn="ctr">
                       <a:solidFill>
-                        <a:srgbClr val="F5E9CC"/>
+                        <a:srgbClr val="F7EDD4"/>
                       </a:solidFill>
                       <a:prstDash val="solid"/>
                     </a:lnL>
                     <a:lnR w="9525" cap="flat" cmpd="sng" algn="ctr">
                       <a:solidFill>
-                        <a:srgbClr val="F5E9CC"/>
+                        <a:srgbClr val="F7EDD4"/>
                       </a:solidFill>
                       <a:prstDash val="solid"/>
                     </a:lnR>
                     <a:lnT w="9525" cap="flat" cmpd="sng" algn="ctr">
                       <a:solidFill>
-                        <a:srgbClr val="F5E9CC"/>
+                        <a:srgbClr val="F7EDD4"/>
                       </a:solidFill>
                       <a:prstDash val="solid"/>
                     </a:lnT>
                     <a:lnB w="9525" cap="flat" cmpd="sng" algn="ctr">
                       <a:solidFill>
-                        <a:srgbClr val="F5E9CC"/>
+                        <a:srgbClr val="F7EDD4"/>
                       </a:solidFill>
                       <a:prstDash val="solid"/>
                     </a:lnB>
                     <a:solidFill>
-                      <a:srgbClr val="FBF7EE"/>
+                      <a:srgbClr val="FCF9F3"/>
                     </a:solidFill>
                   </a:tcPr>
                 </a:tc>
@@ -4309,7 +4309,7 @@
     <p:bg>
       <p:bgPr>
         <a:solidFill>
-          <a:srgbClr val="FBF7EE"/>
+          <a:srgbClr val="FCF9F3"/>
         </a:solidFill>
         <a:effectLst/>
       </p:bgPr>
@@ -4338,7 +4338,7 @@
           <a:noFill/>
           <a:ln w="28575">
             <a:solidFill>
-              <a:srgbClr val="C6992F"/>
+              <a:srgbClr val="DFAD3A"/>
             </a:solidFill>
           </a:ln>
         </p:spPr>
@@ -4367,7 +4367,7 @@
           <a:noFill/>
           <a:ln w="9525">
             <a:solidFill>
-              <a:srgbClr val="F5E9CC"/>
+              <a:srgbClr val="F7EDD4"/>
             </a:solidFill>
           </a:ln>
         </p:spPr>
@@ -4409,7 +4409,7 @@
             <a:r>
               <a:rPr sz="3000" b="1" i="0">
                 <a:solidFill>
-                  <a:srgbClr val="74591B"/>
+                  <a:srgbClr val="72591D"/>
                 </a:solidFill>
               </a:rPr>
               <a:t>가입한 보험 목록</a:t>
@@ -4462,30 +4462,30 @@
                   <a:tcPr anchor="ctr" marL="73152" marR="73152">
                     <a:lnL w="9525" cap="flat" cmpd="sng" algn="ctr">
                       <a:solidFill>
-                        <a:srgbClr val="C6992F"/>
+                        <a:srgbClr val="DFAD3A"/>
                       </a:solidFill>
                       <a:prstDash val="solid"/>
                     </a:lnL>
                     <a:lnR w="9525" cap="flat" cmpd="sng" algn="ctr">
                       <a:solidFill>
-                        <a:srgbClr val="C6992F"/>
+                        <a:srgbClr val="DFAD3A"/>
                       </a:solidFill>
                       <a:prstDash val="solid"/>
                     </a:lnR>
                     <a:lnT w="9525" cap="flat" cmpd="sng" algn="ctr">
                       <a:solidFill>
-                        <a:srgbClr val="C6992F"/>
+                        <a:srgbClr val="DFAD3A"/>
                       </a:solidFill>
                       <a:prstDash val="solid"/>
                     </a:lnT>
                     <a:lnB w="9525" cap="flat" cmpd="sng" algn="ctr">
                       <a:solidFill>
-                        <a:srgbClr val="C6992F"/>
+                        <a:srgbClr val="DFAD3A"/>
                       </a:solidFill>
                       <a:prstDash val="solid"/>
                     </a:lnB>
                     <a:solidFill>
-                      <a:srgbClr val="C6992F"/>
+                      <a:srgbClr val="DFAD3A"/>
                     </a:solidFill>
                   </a:tcPr>
                 </a:tc>
@@ -4508,30 +4508,30 @@
                   <a:tcPr anchor="ctr" marL="73152" marR="73152">
                     <a:lnL w="9525" cap="flat" cmpd="sng" algn="ctr">
                       <a:solidFill>
-                        <a:srgbClr val="C6992F"/>
+                        <a:srgbClr val="DFAD3A"/>
                       </a:solidFill>
                       <a:prstDash val="solid"/>
                     </a:lnL>
                     <a:lnR w="9525" cap="flat" cmpd="sng" algn="ctr">
                       <a:solidFill>
-                        <a:srgbClr val="C6992F"/>
+                        <a:srgbClr val="DFAD3A"/>
                       </a:solidFill>
                       <a:prstDash val="solid"/>
                     </a:lnR>
                     <a:lnT w="9525" cap="flat" cmpd="sng" algn="ctr">
                       <a:solidFill>
-                        <a:srgbClr val="C6992F"/>
+                        <a:srgbClr val="DFAD3A"/>
                       </a:solidFill>
                       <a:prstDash val="solid"/>
                     </a:lnT>
                     <a:lnB w="9525" cap="flat" cmpd="sng" algn="ctr">
                       <a:solidFill>
-                        <a:srgbClr val="C6992F"/>
+                        <a:srgbClr val="DFAD3A"/>
                       </a:solidFill>
                       <a:prstDash val="solid"/>
                     </a:lnB>
                     <a:solidFill>
-                      <a:srgbClr val="C6992F"/>
+                      <a:srgbClr val="DFAD3A"/>
                     </a:solidFill>
                   </a:tcPr>
                 </a:tc>
@@ -4554,30 +4554,30 @@
                   <a:tcPr anchor="ctr" marL="73152" marR="73152">
                     <a:lnL w="9525" cap="flat" cmpd="sng" algn="ctr">
                       <a:solidFill>
-                        <a:srgbClr val="C6992F"/>
+                        <a:srgbClr val="DFAD3A"/>
                       </a:solidFill>
                       <a:prstDash val="solid"/>
                     </a:lnL>
                     <a:lnR w="9525" cap="flat" cmpd="sng" algn="ctr">
                       <a:solidFill>
-                        <a:srgbClr val="C6992F"/>
+                        <a:srgbClr val="DFAD3A"/>
                       </a:solidFill>
                       <a:prstDash val="solid"/>
                     </a:lnR>
                     <a:lnT w="9525" cap="flat" cmpd="sng" algn="ctr">
                       <a:solidFill>
-                        <a:srgbClr val="C6992F"/>
+                        <a:srgbClr val="DFAD3A"/>
                       </a:solidFill>
                       <a:prstDash val="solid"/>
                     </a:lnT>
                     <a:lnB w="9525" cap="flat" cmpd="sng" algn="ctr">
                       <a:solidFill>
-                        <a:srgbClr val="C6992F"/>
+                        <a:srgbClr val="DFAD3A"/>
                       </a:solidFill>
                       <a:prstDash val="solid"/>
                     </a:lnB>
                     <a:solidFill>
-                      <a:srgbClr val="C6992F"/>
+                      <a:srgbClr val="DFAD3A"/>
                     </a:solidFill>
                   </a:tcPr>
                 </a:tc>
@@ -4600,30 +4600,30 @@
                   <a:tcPr anchor="ctr" marL="73152" marR="73152">
                     <a:lnL w="9525" cap="flat" cmpd="sng" algn="ctr">
                       <a:solidFill>
-                        <a:srgbClr val="C6992F"/>
+                        <a:srgbClr val="DFAD3A"/>
                       </a:solidFill>
                       <a:prstDash val="solid"/>
                     </a:lnL>
                     <a:lnR w="9525" cap="flat" cmpd="sng" algn="ctr">
                       <a:solidFill>
-                        <a:srgbClr val="C6992F"/>
+                        <a:srgbClr val="DFAD3A"/>
                       </a:solidFill>
                       <a:prstDash val="solid"/>
                     </a:lnR>
                     <a:lnT w="9525" cap="flat" cmpd="sng" algn="ctr">
                       <a:solidFill>
-                        <a:srgbClr val="C6992F"/>
+                        <a:srgbClr val="DFAD3A"/>
                       </a:solidFill>
                       <a:prstDash val="solid"/>
                     </a:lnT>
                     <a:lnB w="9525" cap="flat" cmpd="sng" algn="ctr">
                       <a:solidFill>
-                        <a:srgbClr val="C6992F"/>
+                        <a:srgbClr val="DFAD3A"/>
                       </a:solidFill>
                       <a:prstDash val="solid"/>
                     </a:lnB>
                     <a:solidFill>
-                      <a:srgbClr val="C6992F"/>
+                      <a:srgbClr val="DFAD3A"/>
                     </a:solidFill>
                   </a:tcPr>
                 </a:tc>
@@ -4646,30 +4646,30 @@
                   <a:tcPr anchor="ctr" marL="73152" marR="73152">
                     <a:lnL w="9525" cap="flat" cmpd="sng" algn="ctr">
                       <a:solidFill>
-                        <a:srgbClr val="C6992F"/>
+                        <a:srgbClr val="DFAD3A"/>
                       </a:solidFill>
                       <a:prstDash val="solid"/>
                     </a:lnL>
                     <a:lnR w="9525" cap="flat" cmpd="sng" algn="ctr">
                       <a:solidFill>
-                        <a:srgbClr val="C6992F"/>
+                        <a:srgbClr val="DFAD3A"/>
                       </a:solidFill>
                       <a:prstDash val="solid"/>
                     </a:lnR>
                     <a:lnT w="9525" cap="flat" cmpd="sng" algn="ctr">
                       <a:solidFill>
-                        <a:srgbClr val="C6992F"/>
+                        <a:srgbClr val="DFAD3A"/>
                       </a:solidFill>
                       <a:prstDash val="solid"/>
                     </a:lnT>
                     <a:lnB w="9525" cap="flat" cmpd="sng" algn="ctr">
                       <a:solidFill>
-                        <a:srgbClr val="C6992F"/>
+                        <a:srgbClr val="DFAD3A"/>
                       </a:solidFill>
                       <a:prstDash val="solid"/>
                     </a:lnB>
                     <a:solidFill>
-                      <a:srgbClr val="C6992F"/>
+                      <a:srgbClr val="DFAD3A"/>
                     </a:solidFill>
                   </a:tcPr>
                 </a:tc>
@@ -4694,25 +4694,25 @@
                   <a:tcPr anchor="ctr" marL="73152" marR="73152">
                     <a:lnL w="9525" cap="flat" cmpd="sng" algn="ctr">
                       <a:solidFill>
-                        <a:srgbClr val="F5E9CC"/>
+                        <a:srgbClr val="F7EDD4"/>
                       </a:solidFill>
                       <a:prstDash val="solid"/>
                     </a:lnL>
                     <a:lnR w="9525" cap="flat" cmpd="sng" algn="ctr">
                       <a:solidFill>
-                        <a:srgbClr val="F5E9CC"/>
+                        <a:srgbClr val="F7EDD4"/>
                       </a:solidFill>
                       <a:prstDash val="solid"/>
                     </a:lnR>
                     <a:lnT w="9525" cap="flat" cmpd="sng" algn="ctr">
                       <a:solidFill>
-                        <a:srgbClr val="F5E9CC"/>
+                        <a:srgbClr val="F7EDD4"/>
                       </a:solidFill>
                       <a:prstDash val="solid"/>
                     </a:lnT>
                     <a:lnB w="9525" cap="flat" cmpd="sng" algn="ctr">
                       <a:solidFill>
-                        <a:srgbClr val="F5E9CC"/>
+                        <a:srgbClr val="F7EDD4"/>
                       </a:solidFill>
                       <a:prstDash val="solid"/>
                     </a:lnB>
@@ -4740,25 +4740,25 @@
                   <a:tcPr anchor="ctr" marL="73152" marR="73152">
                     <a:lnL w="9525" cap="flat" cmpd="sng" algn="ctr">
                       <a:solidFill>
-                        <a:srgbClr val="F5E9CC"/>
+                        <a:srgbClr val="F7EDD4"/>
                       </a:solidFill>
                       <a:prstDash val="solid"/>
                     </a:lnL>
                     <a:lnR w="9525" cap="flat" cmpd="sng" algn="ctr">
                       <a:solidFill>
-                        <a:srgbClr val="F5E9CC"/>
+                        <a:srgbClr val="F7EDD4"/>
                       </a:solidFill>
                       <a:prstDash val="solid"/>
                     </a:lnR>
                     <a:lnT w="9525" cap="flat" cmpd="sng" algn="ctr">
                       <a:solidFill>
-                        <a:srgbClr val="F5E9CC"/>
+                        <a:srgbClr val="F7EDD4"/>
                       </a:solidFill>
                       <a:prstDash val="solid"/>
                     </a:lnT>
                     <a:lnB w="9525" cap="flat" cmpd="sng" algn="ctr">
                       <a:solidFill>
-                        <a:srgbClr val="F5E9CC"/>
+                        <a:srgbClr val="F7EDD4"/>
                       </a:solidFill>
                       <a:prstDash val="solid"/>
                     </a:lnB>
@@ -4786,25 +4786,25 @@
                   <a:tcPr anchor="ctr" marL="73152" marR="73152">
                     <a:lnL w="9525" cap="flat" cmpd="sng" algn="ctr">
                       <a:solidFill>
-                        <a:srgbClr val="F5E9CC"/>
+                        <a:srgbClr val="F7EDD4"/>
                       </a:solidFill>
                       <a:prstDash val="solid"/>
                     </a:lnL>
                     <a:lnR w="9525" cap="flat" cmpd="sng" algn="ctr">
                       <a:solidFill>
-                        <a:srgbClr val="F5E9CC"/>
+                        <a:srgbClr val="F7EDD4"/>
                       </a:solidFill>
                       <a:prstDash val="solid"/>
                     </a:lnR>
                     <a:lnT w="9525" cap="flat" cmpd="sng" algn="ctr">
                       <a:solidFill>
-                        <a:srgbClr val="F5E9CC"/>
+                        <a:srgbClr val="F7EDD4"/>
                       </a:solidFill>
                       <a:prstDash val="solid"/>
                     </a:lnT>
                     <a:lnB w="9525" cap="flat" cmpd="sng" algn="ctr">
                       <a:solidFill>
-                        <a:srgbClr val="F5E9CC"/>
+                        <a:srgbClr val="F7EDD4"/>
                       </a:solidFill>
                       <a:prstDash val="solid"/>
                     </a:lnB>
@@ -4832,25 +4832,25 @@
                   <a:tcPr anchor="ctr" marL="73152" marR="73152">
                     <a:lnL w="9525" cap="flat" cmpd="sng" algn="ctr">
                       <a:solidFill>
-                        <a:srgbClr val="F5E9CC"/>
+                        <a:srgbClr val="F7EDD4"/>
                       </a:solidFill>
                       <a:prstDash val="solid"/>
                     </a:lnL>
                     <a:lnR w="9525" cap="flat" cmpd="sng" algn="ctr">
                       <a:solidFill>
-                        <a:srgbClr val="F5E9CC"/>
+                        <a:srgbClr val="F7EDD4"/>
                       </a:solidFill>
                       <a:prstDash val="solid"/>
                     </a:lnR>
                     <a:lnT w="9525" cap="flat" cmpd="sng" algn="ctr">
                       <a:solidFill>
-                        <a:srgbClr val="F5E9CC"/>
+                        <a:srgbClr val="F7EDD4"/>
                       </a:solidFill>
                       <a:prstDash val="solid"/>
                     </a:lnT>
                     <a:lnB w="9525" cap="flat" cmpd="sng" algn="ctr">
                       <a:solidFill>
-                        <a:srgbClr val="F5E9CC"/>
+                        <a:srgbClr val="F7EDD4"/>
                       </a:solidFill>
                       <a:prstDash val="solid"/>
                     </a:lnB>
@@ -4878,25 +4878,25 @@
                   <a:tcPr anchor="ctr" marL="73152" marR="73152">
                     <a:lnL w="9525" cap="flat" cmpd="sng" algn="ctr">
                       <a:solidFill>
-                        <a:srgbClr val="F5E9CC"/>
+                        <a:srgbClr val="F7EDD4"/>
                       </a:solidFill>
                       <a:prstDash val="solid"/>
                     </a:lnL>
                     <a:lnR w="9525" cap="flat" cmpd="sng" algn="ctr">
                       <a:solidFill>
-                        <a:srgbClr val="F5E9CC"/>
+                        <a:srgbClr val="F7EDD4"/>
                       </a:solidFill>
                       <a:prstDash val="solid"/>
                     </a:lnR>
                     <a:lnT w="9525" cap="flat" cmpd="sng" algn="ctr">
                       <a:solidFill>
-                        <a:srgbClr val="F5E9CC"/>
+                        <a:srgbClr val="F7EDD4"/>
                       </a:solidFill>
                       <a:prstDash val="solid"/>
                     </a:lnT>
                     <a:lnB w="9525" cap="flat" cmpd="sng" algn="ctr">
                       <a:solidFill>
-                        <a:srgbClr val="F5E9CC"/>
+                        <a:srgbClr val="F7EDD4"/>
                       </a:solidFill>
                       <a:prstDash val="solid"/>
                     </a:lnB>
@@ -4926,30 +4926,30 @@
                   <a:tcPr anchor="ctr" marL="73152" marR="73152">
                     <a:lnL w="9525" cap="flat" cmpd="sng" algn="ctr">
                       <a:solidFill>
-                        <a:srgbClr val="F5E9CC"/>
+                        <a:srgbClr val="F7EDD4"/>
                       </a:solidFill>
                       <a:prstDash val="solid"/>
                     </a:lnL>
                     <a:lnR w="9525" cap="flat" cmpd="sng" algn="ctr">
                       <a:solidFill>
-                        <a:srgbClr val="F5E9CC"/>
+                        <a:srgbClr val="F7EDD4"/>
                       </a:solidFill>
                       <a:prstDash val="solid"/>
                     </a:lnR>
                     <a:lnT w="9525" cap="flat" cmpd="sng" algn="ctr">
                       <a:solidFill>
-                        <a:srgbClr val="F5E9CC"/>
+                        <a:srgbClr val="F7EDD4"/>
                       </a:solidFill>
                       <a:prstDash val="solid"/>
                     </a:lnT>
                     <a:lnB w="9525" cap="flat" cmpd="sng" algn="ctr">
                       <a:solidFill>
-                        <a:srgbClr val="F5E9CC"/>
+                        <a:srgbClr val="F7EDD4"/>
                       </a:solidFill>
                       <a:prstDash val="solid"/>
                     </a:lnB>
                     <a:solidFill>
-                      <a:srgbClr val="FBF7EE"/>
+                      <a:srgbClr val="FCF9F3"/>
                     </a:solidFill>
                   </a:tcPr>
                 </a:tc>
@@ -4972,30 +4972,30 @@
                   <a:tcPr anchor="ctr" marL="73152" marR="73152">
                     <a:lnL w="9525" cap="flat" cmpd="sng" algn="ctr">
                       <a:solidFill>
-                        <a:srgbClr val="F5E9CC"/>
+                        <a:srgbClr val="F7EDD4"/>
                       </a:solidFill>
                       <a:prstDash val="solid"/>
                     </a:lnL>
                     <a:lnR w="9525" cap="flat" cmpd="sng" algn="ctr">
                       <a:solidFill>
-                        <a:srgbClr val="F5E9CC"/>
+                        <a:srgbClr val="F7EDD4"/>
                       </a:solidFill>
                       <a:prstDash val="solid"/>
                     </a:lnR>
                     <a:lnT w="9525" cap="flat" cmpd="sng" algn="ctr">
                       <a:solidFill>
-                        <a:srgbClr val="F5E9CC"/>
+                        <a:srgbClr val="F7EDD4"/>
                       </a:solidFill>
                       <a:prstDash val="solid"/>
                     </a:lnT>
                     <a:lnB w="9525" cap="flat" cmpd="sng" algn="ctr">
                       <a:solidFill>
-                        <a:srgbClr val="F5E9CC"/>
+                        <a:srgbClr val="F7EDD4"/>
                       </a:solidFill>
                       <a:prstDash val="solid"/>
                     </a:lnB>
                     <a:solidFill>
-                      <a:srgbClr val="FBF7EE"/>
+                      <a:srgbClr val="FCF9F3"/>
                     </a:solidFill>
                   </a:tcPr>
                 </a:tc>
@@ -5018,30 +5018,30 @@
                   <a:tcPr anchor="ctr" marL="73152" marR="73152">
                     <a:lnL w="9525" cap="flat" cmpd="sng" algn="ctr">
                       <a:solidFill>
-                        <a:srgbClr val="F5E9CC"/>
+                        <a:srgbClr val="F7EDD4"/>
                       </a:solidFill>
                       <a:prstDash val="solid"/>
                     </a:lnL>
                     <a:lnR w="9525" cap="flat" cmpd="sng" algn="ctr">
                       <a:solidFill>
-                        <a:srgbClr val="F5E9CC"/>
+                        <a:srgbClr val="F7EDD4"/>
                       </a:solidFill>
                       <a:prstDash val="solid"/>
                     </a:lnR>
                     <a:lnT w="9525" cap="flat" cmpd="sng" algn="ctr">
                       <a:solidFill>
-                        <a:srgbClr val="F5E9CC"/>
+                        <a:srgbClr val="F7EDD4"/>
                       </a:solidFill>
                       <a:prstDash val="solid"/>
                     </a:lnT>
                     <a:lnB w="9525" cap="flat" cmpd="sng" algn="ctr">
                       <a:solidFill>
-                        <a:srgbClr val="F5E9CC"/>
+                        <a:srgbClr val="F7EDD4"/>
                       </a:solidFill>
                       <a:prstDash val="solid"/>
                     </a:lnB>
                     <a:solidFill>
-                      <a:srgbClr val="FBF7EE"/>
+                      <a:srgbClr val="FCF9F3"/>
                     </a:solidFill>
                   </a:tcPr>
                 </a:tc>
@@ -5064,30 +5064,30 @@
                   <a:tcPr anchor="ctr" marL="73152" marR="73152">
                     <a:lnL w="9525" cap="flat" cmpd="sng" algn="ctr">
                       <a:solidFill>
-                        <a:srgbClr val="F5E9CC"/>
+                        <a:srgbClr val="F7EDD4"/>
                       </a:solidFill>
                       <a:prstDash val="solid"/>
                     </a:lnL>
                     <a:lnR w="9525" cap="flat" cmpd="sng" algn="ctr">
                       <a:solidFill>
-                        <a:srgbClr val="F5E9CC"/>
+                        <a:srgbClr val="F7EDD4"/>
                       </a:solidFill>
                       <a:prstDash val="solid"/>
                     </a:lnR>
                     <a:lnT w="9525" cap="flat" cmpd="sng" algn="ctr">
                       <a:solidFill>
-                        <a:srgbClr val="F5E9CC"/>
+                        <a:srgbClr val="F7EDD4"/>
                       </a:solidFill>
                       <a:prstDash val="solid"/>
                     </a:lnT>
                     <a:lnB w="9525" cap="flat" cmpd="sng" algn="ctr">
                       <a:solidFill>
-                        <a:srgbClr val="F5E9CC"/>
+                        <a:srgbClr val="F7EDD4"/>
                       </a:solidFill>
                       <a:prstDash val="solid"/>
                     </a:lnB>
                     <a:solidFill>
-                      <a:srgbClr val="FBF7EE"/>
+                      <a:srgbClr val="FCF9F3"/>
                     </a:solidFill>
                   </a:tcPr>
                 </a:tc>
@@ -5110,30 +5110,30 @@
                   <a:tcPr anchor="ctr" marL="73152" marR="73152">
                     <a:lnL w="9525" cap="flat" cmpd="sng" algn="ctr">
                       <a:solidFill>
-                        <a:srgbClr val="F5E9CC"/>
+                        <a:srgbClr val="F7EDD4"/>
                       </a:solidFill>
                       <a:prstDash val="solid"/>
                     </a:lnL>
                     <a:lnR w="9525" cap="flat" cmpd="sng" algn="ctr">
                       <a:solidFill>
-                        <a:srgbClr val="F5E9CC"/>
+                        <a:srgbClr val="F7EDD4"/>
                       </a:solidFill>
                       <a:prstDash val="solid"/>
                     </a:lnR>
                     <a:lnT w="9525" cap="flat" cmpd="sng" algn="ctr">
                       <a:solidFill>
-                        <a:srgbClr val="F5E9CC"/>
+                        <a:srgbClr val="F7EDD4"/>
                       </a:solidFill>
                       <a:prstDash val="solid"/>
                     </a:lnT>
                     <a:lnB w="9525" cap="flat" cmpd="sng" algn="ctr">
                       <a:solidFill>
-                        <a:srgbClr val="F5E9CC"/>
+                        <a:srgbClr val="F7EDD4"/>
                       </a:solidFill>
                       <a:prstDash val="solid"/>
                     </a:lnB>
                     <a:solidFill>
-                      <a:srgbClr val="FBF7EE"/>
+                      <a:srgbClr val="FCF9F3"/>
                     </a:solidFill>
                   </a:tcPr>
                 </a:tc>
@@ -5158,25 +5158,25 @@
                   <a:tcPr anchor="ctr" marL="73152" marR="73152">
                     <a:lnL w="9525" cap="flat" cmpd="sng" algn="ctr">
                       <a:solidFill>
-                        <a:srgbClr val="F5E9CC"/>
+                        <a:srgbClr val="F7EDD4"/>
                       </a:solidFill>
                       <a:prstDash val="solid"/>
                     </a:lnL>
                     <a:lnR w="9525" cap="flat" cmpd="sng" algn="ctr">
                       <a:solidFill>
-                        <a:srgbClr val="F5E9CC"/>
+                        <a:srgbClr val="F7EDD4"/>
                       </a:solidFill>
                       <a:prstDash val="solid"/>
                     </a:lnR>
                     <a:lnT w="9525" cap="flat" cmpd="sng" algn="ctr">
                       <a:solidFill>
-                        <a:srgbClr val="F5E9CC"/>
+                        <a:srgbClr val="F7EDD4"/>
                       </a:solidFill>
                       <a:prstDash val="solid"/>
                     </a:lnT>
                     <a:lnB w="9525" cap="flat" cmpd="sng" algn="ctr">
                       <a:solidFill>
-                        <a:srgbClr val="F5E9CC"/>
+                        <a:srgbClr val="F7EDD4"/>
                       </a:solidFill>
                       <a:prstDash val="solid"/>
                     </a:lnB>
@@ -5204,25 +5204,25 @@
                   <a:tcPr anchor="ctr" marL="73152" marR="73152">
                     <a:lnL w="9525" cap="flat" cmpd="sng" algn="ctr">
                       <a:solidFill>
-                        <a:srgbClr val="F5E9CC"/>
+                        <a:srgbClr val="F7EDD4"/>
                       </a:solidFill>
                       <a:prstDash val="solid"/>
                     </a:lnL>
                     <a:lnR w="9525" cap="flat" cmpd="sng" algn="ctr">
                       <a:solidFill>
-                        <a:srgbClr val="F5E9CC"/>
+                        <a:srgbClr val="F7EDD4"/>
                       </a:solidFill>
                       <a:prstDash val="solid"/>
                     </a:lnR>
                     <a:lnT w="9525" cap="flat" cmpd="sng" algn="ctr">
                       <a:solidFill>
-                        <a:srgbClr val="F5E9CC"/>
+                        <a:srgbClr val="F7EDD4"/>
                       </a:solidFill>
                       <a:prstDash val="solid"/>
                     </a:lnT>
                     <a:lnB w="9525" cap="flat" cmpd="sng" algn="ctr">
                       <a:solidFill>
-                        <a:srgbClr val="F5E9CC"/>
+                        <a:srgbClr val="F7EDD4"/>
                       </a:solidFill>
                       <a:prstDash val="solid"/>
                     </a:lnB>
@@ -5250,25 +5250,25 @@
                   <a:tcPr anchor="ctr" marL="73152" marR="73152">
                     <a:lnL w="9525" cap="flat" cmpd="sng" algn="ctr">
                       <a:solidFill>
-                        <a:srgbClr val="F5E9CC"/>
+                        <a:srgbClr val="F7EDD4"/>
                       </a:solidFill>
                       <a:prstDash val="solid"/>
                     </a:lnL>
                     <a:lnR w="9525" cap="flat" cmpd="sng" algn="ctr">
                       <a:solidFill>
-                        <a:srgbClr val="F5E9CC"/>
+                        <a:srgbClr val="F7EDD4"/>
                       </a:solidFill>
                       <a:prstDash val="solid"/>
                     </a:lnR>
                     <a:lnT w="9525" cap="flat" cmpd="sng" algn="ctr">
                       <a:solidFill>
-                        <a:srgbClr val="F5E9CC"/>
+                        <a:srgbClr val="F7EDD4"/>
                       </a:solidFill>
                       <a:prstDash val="solid"/>
                     </a:lnT>
                     <a:lnB w="9525" cap="flat" cmpd="sng" algn="ctr">
                       <a:solidFill>
-                        <a:srgbClr val="F5E9CC"/>
+                        <a:srgbClr val="F7EDD4"/>
                       </a:solidFill>
                       <a:prstDash val="solid"/>
                     </a:lnB>
@@ -5296,25 +5296,25 @@
                   <a:tcPr anchor="ctr" marL="73152" marR="73152">
                     <a:lnL w="9525" cap="flat" cmpd="sng" algn="ctr">
                       <a:solidFill>
-                        <a:srgbClr val="F5E9CC"/>
+                        <a:srgbClr val="F7EDD4"/>
                       </a:solidFill>
                       <a:prstDash val="solid"/>
                     </a:lnL>
                     <a:lnR w="9525" cap="flat" cmpd="sng" algn="ctr">
                       <a:solidFill>
-                        <a:srgbClr val="F5E9CC"/>
+                        <a:srgbClr val="F7EDD4"/>
                       </a:solidFill>
                       <a:prstDash val="solid"/>
                     </a:lnR>
                     <a:lnT w="9525" cap="flat" cmpd="sng" algn="ctr">
                       <a:solidFill>
-                        <a:srgbClr val="F5E9CC"/>
+                        <a:srgbClr val="F7EDD4"/>
                       </a:solidFill>
                       <a:prstDash val="solid"/>
                     </a:lnT>
                     <a:lnB w="9525" cap="flat" cmpd="sng" algn="ctr">
                       <a:solidFill>
-                        <a:srgbClr val="F5E9CC"/>
+                        <a:srgbClr val="F7EDD4"/>
                       </a:solidFill>
                       <a:prstDash val="solid"/>
                     </a:lnB>
@@ -5342,25 +5342,25 @@
                   <a:tcPr anchor="ctr" marL="73152" marR="73152">
                     <a:lnL w="9525" cap="flat" cmpd="sng" algn="ctr">
                       <a:solidFill>
-                        <a:srgbClr val="F5E9CC"/>
+                        <a:srgbClr val="F7EDD4"/>
                       </a:solidFill>
                       <a:prstDash val="solid"/>
                     </a:lnL>
                     <a:lnR w="9525" cap="flat" cmpd="sng" algn="ctr">
                       <a:solidFill>
-                        <a:srgbClr val="F5E9CC"/>
+                        <a:srgbClr val="F7EDD4"/>
                       </a:solidFill>
                       <a:prstDash val="solid"/>
                     </a:lnR>
                     <a:lnT w="9525" cap="flat" cmpd="sng" algn="ctr">
                       <a:solidFill>
-                        <a:srgbClr val="F5E9CC"/>
+                        <a:srgbClr val="F7EDD4"/>
                       </a:solidFill>
                       <a:prstDash val="solid"/>
                     </a:lnT>
                     <a:lnB w="9525" cap="flat" cmpd="sng" algn="ctr">
                       <a:solidFill>
-                        <a:srgbClr val="F5E9CC"/>
+                        <a:srgbClr val="F7EDD4"/>
                       </a:solidFill>
                       <a:prstDash val="solid"/>
                     </a:lnB>
@@ -5390,30 +5390,30 @@
                   <a:tcPr anchor="ctr" marL="73152" marR="73152">
                     <a:lnL w="9525" cap="flat" cmpd="sng" algn="ctr">
                       <a:solidFill>
-                        <a:srgbClr val="F5E9CC"/>
+                        <a:srgbClr val="F7EDD4"/>
                       </a:solidFill>
                       <a:prstDash val="solid"/>
                     </a:lnL>
                     <a:lnR w="9525" cap="flat" cmpd="sng" algn="ctr">
                       <a:solidFill>
-                        <a:srgbClr val="F5E9CC"/>
+                        <a:srgbClr val="F7EDD4"/>
                       </a:solidFill>
                       <a:prstDash val="solid"/>
                     </a:lnR>
                     <a:lnT w="9525" cap="flat" cmpd="sng" algn="ctr">
                       <a:solidFill>
-                        <a:srgbClr val="F5E9CC"/>
+                        <a:srgbClr val="F7EDD4"/>
                       </a:solidFill>
                       <a:prstDash val="solid"/>
                     </a:lnT>
                     <a:lnB w="9525" cap="flat" cmpd="sng" algn="ctr">
                       <a:solidFill>
-                        <a:srgbClr val="F5E9CC"/>
+                        <a:srgbClr val="F7EDD4"/>
                       </a:solidFill>
                       <a:prstDash val="solid"/>
                     </a:lnB>
                     <a:solidFill>
-                      <a:srgbClr val="FBF7EE"/>
+                      <a:srgbClr val="FCF9F3"/>
                     </a:solidFill>
                   </a:tcPr>
                 </a:tc>
@@ -5436,30 +5436,30 @@
                   <a:tcPr anchor="ctr" marL="73152" marR="73152">
                     <a:lnL w="9525" cap="flat" cmpd="sng" algn="ctr">
                       <a:solidFill>
-                        <a:srgbClr val="F5E9CC"/>
+                        <a:srgbClr val="F7EDD4"/>
                       </a:solidFill>
                       <a:prstDash val="solid"/>
                     </a:lnL>
                     <a:lnR w="9525" cap="flat" cmpd="sng" algn="ctr">
                       <a:solidFill>
-                        <a:srgbClr val="F5E9CC"/>
+                        <a:srgbClr val="F7EDD4"/>
                       </a:solidFill>
                       <a:prstDash val="solid"/>
                     </a:lnR>
                     <a:lnT w="9525" cap="flat" cmpd="sng" algn="ctr">
                       <a:solidFill>
-                        <a:srgbClr val="F5E9CC"/>
+                        <a:srgbClr val="F7EDD4"/>
                       </a:solidFill>
                       <a:prstDash val="solid"/>
                     </a:lnT>
                     <a:lnB w="9525" cap="flat" cmpd="sng" algn="ctr">
                       <a:solidFill>
-                        <a:srgbClr val="F5E9CC"/>
+                        <a:srgbClr val="F7EDD4"/>
                       </a:solidFill>
                       <a:prstDash val="solid"/>
                     </a:lnB>
                     <a:solidFill>
-                      <a:srgbClr val="FBF7EE"/>
+                      <a:srgbClr val="FCF9F3"/>
                     </a:solidFill>
                   </a:tcPr>
                 </a:tc>
@@ -5482,30 +5482,30 @@
                   <a:tcPr anchor="ctr" marL="73152" marR="73152">
                     <a:lnL w="9525" cap="flat" cmpd="sng" algn="ctr">
                       <a:solidFill>
-                        <a:srgbClr val="F5E9CC"/>
+                        <a:srgbClr val="F7EDD4"/>
                       </a:solidFill>
                       <a:prstDash val="solid"/>
                     </a:lnL>
                     <a:lnR w="9525" cap="flat" cmpd="sng" algn="ctr">
                       <a:solidFill>
-                        <a:srgbClr val="F5E9CC"/>
+                        <a:srgbClr val="F7EDD4"/>
                       </a:solidFill>
                       <a:prstDash val="solid"/>
                     </a:lnR>
                     <a:lnT w="9525" cap="flat" cmpd="sng" algn="ctr">
                       <a:solidFill>
-                        <a:srgbClr val="F5E9CC"/>
+                        <a:srgbClr val="F7EDD4"/>
                       </a:solidFill>
                       <a:prstDash val="solid"/>
                     </a:lnT>
                     <a:lnB w="9525" cap="flat" cmpd="sng" algn="ctr">
                       <a:solidFill>
-                        <a:srgbClr val="F5E9CC"/>
+                        <a:srgbClr val="F7EDD4"/>
                       </a:solidFill>
                       <a:prstDash val="solid"/>
                     </a:lnB>
                     <a:solidFill>
-                      <a:srgbClr val="FBF7EE"/>
+                      <a:srgbClr val="FCF9F3"/>
                     </a:solidFill>
                   </a:tcPr>
                 </a:tc>
@@ -5528,30 +5528,30 @@
                   <a:tcPr anchor="ctr" marL="73152" marR="73152">
                     <a:lnL w="9525" cap="flat" cmpd="sng" algn="ctr">
                       <a:solidFill>
-                        <a:srgbClr val="F5E9CC"/>
+                        <a:srgbClr val="F7EDD4"/>
                       </a:solidFill>
                       <a:prstDash val="solid"/>
                     </a:lnL>
                     <a:lnR w="9525" cap="flat" cmpd="sng" algn="ctr">
                       <a:solidFill>
-                        <a:srgbClr val="F5E9CC"/>
+                        <a:srgbClr val="F7EDD4"/>
                       </a:solidFill>
                       <a:prstDash val="solid"/>
                     </a:lnR>
                     <a:lnT w="9525" cap="flat" cmpd="sng" algn="ctr">
                       <a:solidFill>
-                        <a:srgbClr val="F5E9CC"/>
+                        <a:srgbClr val="F7EDD4"/>
                       </a:solidFill>
                       <a:prstDash val="solid"/>
                     </a:lnT>
                     <a:lnB w="9525" cap="flat" cmpd="sng" algn="ctr">
                       <a:solidFill>
-                        <a:srgbClr val="F5E9CC"/>
+                        <a:srgbClr val="F7EDD4"/>
                       </a:solidFill>
                       <a:prstDash val="solid"/>
                     </a:lnB>
                     <a:solidFill>
-                      <a:srgbClr val="FBF7EE"/>
+                      <a:srgbClr val="FCF9F3"/>
                     </a:solidFill>
                   </a:tcPr>
                 </a:tc>
@@ -5574,30 +5574,30 @@
                   <a:tcPr anchor="ctr" marL="73152" marR="73152">
                     <a:lnL w="9525" cap="flat" cmpd="sng" algn="ctr">
                       <a:solidFill>
-                        <a:srgbClr val="F5E9CC"/>
+                        <a:srgbClr val="F7EDD4"/>
                       </a:solidFill>
                       <a:prstDash val="solid"/>
                     </a:lnL>
                     <a:lnR w="9525" cap="flat" cmpd="sng" algn="ctr">
                       <a:solidFill>
-                        <a:srgbClr val="F5E9CC"/>
+                        <a:srgbClr val="F7EDD4"/>
                       </a:solidFill>
                       <a:prstDash val="solid"/>
                     </a:lnR>
                     <a:lnT w="9525" cap="flat" cmpd="sng" algn="ctr">
                       <a:solidFill>
-                        <a:srgbClr val="F5E9CC"/>
+                        <a:srgbClr val="F7EDD4"/>
                       </a:solidFill>
                       <a:prstDash val="solid"/>
                     </a:lnT>
                     <a:lnB w="9525" cap="flat" cmpd="sng" algn="ctr">
                       <a:solidFill>
-                        <a:srgbClr val="F5E9CC"/>
+                        <a:srgbClr val="F7EDD4"/>
                       </a:solidFill>
                       <a:prstDash val="solid"/>
                     </a:lnB>
                     <a:solidFill>
-                      <a:srgbClr val="FBF7EE"/>
+                      <a:srgbClr val="FCF9F3"/>
                     </a:solidFill>
                   </a:tcPr>
                 </a:tc>
@@ -5622,25 +5622,25 @@
                   <a:tcPr anchor="ctr" marL="73152" marR="73152">
                     <a:lnL w="9525" cap="flat" cmpd="sng" algn="ctr">
                       <a:solidFill>
-                        <a:srgbClr val="F5E9CC"/>
+                        <a:srgbClr val="F7EDD4"/>
                       </a:solidFill>
                       <a:prstDash val="solid"/>
                     </a:lnL>
                     <a:lnR w="9525" cap="flat" cmpd="sng" algn="ctr">
                       <a:solidFill>
-                        <a:srgbClr val="F5E9CC"/>
+                        <a:srgbClr val="F7EDD4"/>
                       </a:solidFill>
                       <a:prstDash val="solid"/>
                     </a:lnR>
                     <a:lnT w="9525" cap="flat" cmpd="sng" algn="ctr">
                       <a:solidFill>
-                        <a:srgbClr val="F5E9CC"/>
+                        <a:srgbClr val="F7EDD4"/>
                       </a:solidFill>
                       <a:prstDash val="solid"/>
                     </a:lnT>
                     <a:lnB w="9525" cap="flat" cmpd="sng" algn="ctr">
                       <a:solidFill>
-                        <a:srgbClr val="F5E9CC"/>
+                        <a:srgbClr val="F7EDD4"/>
                       </a:solidFill>
                       <a:prstDash val="solid"/>
                     </a:lnB>
@@ -5668,25 +5668,25 @@
                   <a:tcPr anchor="ctr" marL="73152" marR="73152">
                     <a:lnL w="9525" cap="flat" cmpd="sng" algn="ctr">
                       <a:solidFill>
-                        <a:srgbClr val="F5E9CC"/>
+                        <a:srgbClr val="F7EDD4"/>
                       </a:solidFill>
                       <a:prstDash val="solid"/>
                     </a:lnL>
                     <a:lnR w="9525" cap="flat" cmpd="sng" algn="ctr">
                       <a:solidFill>
-                        <a:srgbClr val="F5E9CC"/>
+                        <a:srgbClr val="F7EDD4"/>
                       </a:solidFill>
                       <a:prstDash val="solid"/>
                     </a:lnR>
                     <a:lnT w="9525" cap="flat" cmpd="sng" algn="ctr">
                       <a:solidFill>
-                        <a:srgbClr val="F5E9CC"/>
+                        <a:srgbClr val="F7EDD4"/>
                       </a:solidFill>
                       <a:prstDash val="solid"/>
                     </a:lnT>
                     <a:lnB w="9525" cap="flat" cmpd="sng" algn="ctr">
                       <a:solidFill>
-                        <a:srgbClr val="F5E9CC"/>
+                        <a:srgbClr val="F7EDD4"/>
                       </a:solidFill>
                       <a:prstDash val="solid"/>
                     </a:lnB>
@@ -5714,25 +5714,25 @@
                   <a:tcPr anchor="ctr" marL="73152" marR="73152">
                     <a:lnL w="9525" cap="flat" cmpd="sng" algn="ctr">
                       <a:solidFill>
-                        <a:srgbClr val="F5E9CC"/>
+                        <a:srgbClr val="F7EDD4"/>
                       </a:solidFill>
                       <a:prstDash val="solid"/>
                     </a:lnL>
                     <a:lnR w="9525" cap="flat" cmpd="sng" algn="ctr">
                       <a:solidFill>
-                        <a:srgbClr val="F5E9CC"/>
+                        <a:srgbClr val="F7EDD4"/>
                       </a:solidFill>
                       <a:prstDash val="solid"/>
                     </a:lnR>
                     <a:lnT w="9525" cap="flat" cmpd="sng" algn="ctr">
                       <a:solidFill>
-                        <a:srgbClr val="F5E9CC"/>
+                        <a:srgbClr val="F7EDD4"/>
                       </a:solidFill>
                       <a:prstDash val="solid"/>
                     </a:lnT>
                     <a:lnB w="9525" cap="flat" cmpd="sng" algn="ctr">
                       <a:solidFill>
-                        <a:srgbClr val="F5E9CC"/>
+                        <a:srgbClr val="F7EDD4"/>
                       </a:solidFill>
                       <a:prstDash val="solid"/>
                     </a:lnB>
@@ -5760,25 +5760,25 @@
                   <a:tcPr anchor="ctr" marL="73152" marR="73152">
                     <a:lnL w="9525" cap="flat" cmpd="sng" algn="ctr">
                       <a:solidFill>
-                        <a:srgbClr val="F5E9CC"/>
+                        <a:srgbClr val="F7EDD4"/>
                       </a:solidFill>
                       <a:prstDash val="solid"/>
                     </a:lnL>
                     <a:lnR w="9525" cap="flat" cmpd="sng" algn="ctr">
                       <a:solidFill>
-                        <a:srgbClr val="F5E9CC"/>
+                        <a:srgbClr val="F7EDD4"/>
                       </a:solidFill>
                       <a:prstDash val="solid"/>
                     </a:lnR>
                     <a:lnT w="9525" cap="flat" cmpd="sng" algn="ctr">
                       <a:solidFill>
-                        <a:srgbClr val="F5E9CC"/>
+                        <a:srgbClr val="F7EDD4"/>
                       </a:solidFill>
                       <a:prstDash val="solid"/>
                     </a:lnT>
                     <a:lnB w="9525" cap="flat" cmpd="sng" algn="ctr">
                       <a:solidFill>
-                        <a:srgbClr val="F5E9CC"/>
+                        <a:srgbClr val="F7EDD4"/>
                       </a:solidFill>
                       <a:prstDash val="solid"/>
                     </a:lnB>
@@ -5806,25 +5806,25 @@
                   <a:tcPr anchor="ctr" marL="73152" marR="73152">
                     <a:lnL w="9525" cap="flat" cmpd="sng" algn="ctr">
                       <a:solidFill>
-                        <a:srgbClr val="F5E9CC"/>
+                        <a:srgbClr val="F7EDD4"/>
                       </a:solidFill>
                       <a:prstDash val="solid"/>
                     </a:lnL>
                     <a:lnR w="9525" cap="flat" cmpd="sng" algn="ctr">
                       <a:solidFill>
-                        <a:srgbClr val="F5E9CC"/>
+                        <a:srgbClr val="F7EDD4"/>
                       </a:solidFill>
                       <a:prstDash val="solid"/>
                     </a:lnR>
                     <a:lnT w="9525" cap="flat" cmpd="sng" algn="ctr">
                       <a:solidFill>
-                        <a:srgbClr val="F5E9CC"/>
+                        <a:srgbClr val="F7EDD4"/>
                       </a:solidFill>
                       <a:prstDash val="solid"/>
                     </a:lnT>
                     <a:lnB w="9525" cap="flat" cmpd="sng" algn="ctr">
                       <a:solidFill>
-                        <a:srgbClr val="F5E9CC"/>
+                        <a:srgbClr val="F7EDD4"/>
                       </a:solidFill>
                       <a:prstDash val="solid"/>
                     </a:lnB>
@@ -5854,30 +5854,30 @@
                   <a:tcPr anchor="ctr" marL="73152" marR="73152">
                     <a:lnL w="9525" cap="flat" cmpd="sng" algn="ctr">
                       <a:solidFill>
-                        <a:srgbClr val="F5E9CC"/>
+                        <a:srgbClr val="F7EDD4"/>
                       </a:solidFill>
                       <a:prstDash val="solid"/>
                     </a:lnL>
                     <a:lnR w="9525" cap="flat" cmpd="sng" algn="ctr">
                       <a:solidFill>
-                        <a:srgbClr val="F5E9CC"/>
+                        <a:srgbClr val="F7EDD4"/>
                       </a:solidFill>
                       <a:prstDash val="solid"/>
                     </a:lnR>
                     <a:lnT w="9525" cap="flat" cmpd="sng" algn="ctr">
                       <a:solidFill>
-                        <a:srgbClr val="F5E9CC"/>
+                        <a:srgbClr val="F7EDD4"/>
                       </a:solidFill>
                       <a:prstDash val="solid"/>
                     </a:lnT>
                     <a:lnB w="9525" cap="flat" cmpd="sng" algn="ctr">
                       <a:solidFill>
-                        <a:srgbClr val="F5E9CC"/>
+                        <a:srgbClr val="F7EDD4"/>
                       </a:solidFill>
                       <a:prstDash val="solid"/>
                     </a:lnB>
                     <a:solidFill>
-                      <a:srgbClr val="FBF7EE"/>
+                      <a:srgbClr val="FCF9F3"/>
                     </a:solidFill>
                   </a:tcPr>
                 </a:tc>
@@ -5900,30 +5900,30 @@
                   <a:tcPr anchor="ctr" marL="73152" marR="73152">
                     <a:lnL w="9525" cap="flat" cmpd="sng" algn="ctr">
                       <a:solidFill>
-                        <a:srgbClr val="F5E9CC"/>
+                        <a:srgbClr val="F7EDD4"/>
                       </a:solidFill>
                       <a:prstDash val="solid"/>
                     </a:lnL>
                     <a:lnR w="9525" cap="flat" cmpd="sng" algn="ctr">
                       <a:solidFill>
-                        <a:srgbClr val="F5E9CC"/>
+                        <a:srgbClr val="F7EDD4"/>
                       </a:solidFill>
                       <a:prstDash val="solid"/>
                     </a:lnR>
                     <a:lnT w="9525" cap="flat" cmpd="sng" algn="ctr">
                       <a:solidFill>
-                        <a:srgbClr val="F5E9CC"/>
+                        <a:srgbClr val="F7EDD4"/>
                       </a:solidFill>
                       <a:prstDash val="solid"/>
                     </a:lnT>
                     <a:lnB w="9525" cap="flat" cmpd="sng" algn="ctr">
                       <a:solidFill>
-                        <a:srgbClr val="F5E9CC"/>
+                        <a:srgbClr val="F7EDD4"/>
                       </a:solidFill>
                       <a:prstDash val="solid"/>
                     </a:lnB>
                     <a:solidFill>
-                      <a:srgbClr val="FBF7EE"/>
+                      <a:srgbClr val="FCF9F3"/>
                     </a:solidFill>
                   </a:tcPr>
                 </a:tc>
@@ -5946,30 +5946,30 @@
                   <a:tcPr anchor="ctr" marL="73152" marR="73152">
                     <a:lnL w="9525" cap="flat" cmpd="sng" algn="ctr">
                       <a:solidFill>
-                        <a:srgbClr val="F5E9CC"/>
+                        <a:srgbClr val="F7EDD4"/>
                       </a:solidFill>
                       <a:prstDash val="solid"/>
                     </a:lnL>
                     <a:lnR w="9525" cap="flat" cmpd="sng" algn="ctr">
                       <a:solidFill>
-                        <a:srgbClr val="F5E9CC"/>
+                        <a:srgbClr val="F7EDD4"/>
                       </a:solidFill>
                       <a:prstDash val="solid"/>
                     </a:lnR>
                     <a:lnT w="9525" cap="flat" cmpd="sng" algn="ctr">
                       <a:solidFill>
-                        <a:srgbClr val="F5E9CC"/>
+                        <a:srgbClr val="F7EDD4"/>
                       </a:solidFill>
                       <a:prstDash val="solid"/>
                     </a:lnT>
                     <a:lnB w="9525" cap="flat" cmpd="sng" algn="ctr">
                       <a:solidFill>
-                        <a:srgbClr val="F5E9CC"/>
+                        <a:srgbClr val="F7EDD4"/>
                       </a:solidFill>
                       <a:prstDash val="solid"/>
                     </a:lnB>
                     <a:solidFill>
-                      <a:srgbClr val="FBF7EE"/>
+                      <a:srgbClr val="FCF9F3"/>
                     </a:solidFill>
                   </a:tcPr>
                 </a:tc>
@@ -5992,30 +5992,30 @@
                   <a:tcPr anchor="ctr" marL="73152" marR="73152">
                     <a:lnL w="9525" cap="flat" cmpd="sng" algn="ctr">
                       <a:solidFill>
-                        <a:srgbClr val="F5E9CC"/>
+                        <a:srgbClr val="F7EDD4"/>
                       </a:solidFill>
                       <a:prstDash val="solid"/>
                     </a:lnL>
                     <a:lnR w="9525" cap="flat" cmpd="sng" algn="ctr">
                       <a:solidFill>
-                        <a:srgbClr val="F5E9CC"/>
+                        <a:srgbClr val="F7EDD4"/>
                       </a:solidFill>
                       <a:prstDash val="solid"/>
                     </a:lnR>
                     <a:lnT w="9525" cap="flat" cmpd="sng" algn="ctr">
                       <a:solidFill>
-                        <a:srgbClr val="F5E9CC"/>
+                        <a:srgbClr val="F7EDD4"/>
                       </a:solidFill>
                       <a:prstDash val="solid"/>
                     </a:lnT>
                     <a:lnB w="9525" cap="flat" cmpd="sng" algn="ctr">
                       <a:solidFill>
-                        <a:srgbClr val="F5E9CC"/>
+                        <a:srgbClr val="F7EDD4"/>
                       </a:solidFill>
                       <a:prstDash val="solid"/>
                     </a:lnB>
                     <a:solidFill>
-                      <a:srgbClr val="FBF7EE"/>
+                      <a:srgbClr val="FCF9F3"/>
                     </a:solidFill>
                   </a:tcPr>
                 </a:tc>
@@ -6038,30 +6038,30 @@
                   <a:tcPr anchor="ctr" marL="73152" marR="73152">
                     <a:lnL w="9525" cap="flat" cmpd="sng" algn="ctr">
                       <a:solidFill>
-                        <a:srgbClr val="F5E9CC"/>
+                        <a:srgbClr val="F7EDD4"/>
                       </a:solidFill>
                       <a:prstDash val="solid"/>
                     </a:lnL>
                     <a:lnR w="9525" cap="flat" cmpd="sng" algn="ctr">
                       <a:solidFill>
-                        <a:srgbClr val="F5E9CC"/>
+                        <a:srgbClr val="F7EDD4"/>
                       </a:solidFill>
                       <a:prstDash val="solid"/>
                     </a:lnR>
                     <a:lnT w="9525" cap="flat" cmpd="sng" algn="ctr">
                       <a:solidFill>
-                        <a:srgbClr val="F5E9CC"/>
+                        <a:srgbClr val="F7EDD4"/>
                       </a:solidFill>
                       <a:prstDash val="solid"/>
                     </a:lnT>
                     <a:lnB w="9525" cap="flat" cmpd="sng" algn="ctr">
                       <a:solidFill>
-                        <a:srgbClr val="F5E9CC"/>
+                        <a:srgbClr val="F7EDD4"/>
                       </a:solidFill>
                       <a:prstDash val="solid"/>
                     </a:lnB>
                     <a:solidFill>
-                      <a:srgbClr val="FBF7EE"/>
+                      <a:srgbClr val="FCF9F3"/>
                     </a:solidFill>
                   </a:tcPr>
                 </a:tc>
@@ -6084,7 +6084,7 @@
     <p:bg>
       <p:bgPr>
         <a:solidFill>
-          <a:srgbClr val="FBF7EE"/>
+          <a:srgbClr val="FCF9F3"/>
         </a:solidFill>
         <a:effectLst/>
       </p:bgPr>
@@ -6113,7 +6113,7 @@
           <a:noFill/>
           <a:ln w="28575">
             <a:solidFill>
-              <a:srgbClr val="C6992F"/>
+              <a:srgbClr val="DFAD3A"/>
             </a:solidFill>
           </a:ln>
         </p:spPr>
@@ -6142,7 +6142,7 @@
           <a:noFill/>
           <a:ln w="9525">
             <a:solidFill>
-              <a:srgbClr val="F5E9CC"/>
+              <a:srgbClr val="F7EDD4"/>
             </a:solidFill>
           </a:ln>
         </p:spPr>
@@ -6184,7 +6184,7 @@
             <a:r>
               <a:rPr sz="3000" b="1" i="0">
                 <a:solidFill>
-                  <a:srgbClr val="74591B"/>
+                  <a:srgbClr val="72591D"/>
                 </a:solidFill>
               </a:rPr>
               <a:t>보장 항목 체크</a:t>
@@ -6236,30 +6236,30 @@
                   <a:tcPr anchor="ctr" marL="73152" marR="73152">
                     <a:lnL w="9525" cap="flat" cmpd="sng" algn="ctr">
                       <a:solidFill>
-                        <a:srgbClr val="C6992F"/>
+                        <a:srgbClr val="DFAD3A"/>
                       </a:solidFill>
                       <a:prstDash val="solid"/>
                     </a:lnL>
                     <a:lnR w="9525" cap="flat" cmpd="sng" algn="ctr">
                       <a:solidFill>
-                        <a:srgbClr val="C6992F"/>
+                        <a:srgbClr val="DFAD3A"/>
                       </a:solidFill>
                       <a:prstDash val="solid"/>
                     </a:lnR>
                     <a:lnT w="9525" cap="flat" cmpd="sng" algn="ctr">
                       <a:solidFill>
-                        <a:srgbClr val="C6992F"/>
+                        <a:srgbClr val="DFAD3A"/>
                       </a:solidFill>
                       <a:prstDash val="solid"/>
                     </a:lnT>
                     <a:lnB w="9525" cap="flat" cmpd="sng" algn="ctr">
                       <a:solidFill>
-                        <a:srgbClr val="C6992F"/>
+                        <a:srgbClr val="DFAD3A"/>
                       </a:solidFill>
                       <a:prstDash val="solid"/>
                     </a:lnB>
                     <a:solidFill>
-                      <a:srgbClr val="C6992F"/>
+                      <a:srgbClr val="DFAD3A"/>
                     </a:solidFill>
                   </a:tcPr>
                 </a:tc>
@@ -6282,30 +6282,30 @@
                   <a:tcPr anchor="ctr" marL="73152" marR="73152">
                     <a:lnL w="9525" cap="flat" cmpd="sng" algn="ctr">
                       <a:solidFill>
-                        <a:srgbClr val="C6992F"/>
+                        <a:srgbClr val="DFAD3A"/>
                       </a:solidFill>
                       <a:prstDash val="solid"/>
                     </a:lnL>
                     <a:lnR w="9525" cap="flat" cmpd="sng" algn="ctr">
                       <a:solidFill>
-                        <a:srgbClr val="C6992F"/>
+                        <a:srgbClr val="DFAD3A"/>
                       </a:solidFill>
                       <a:prstDash val="solid"/>
                     </a:lnR>
                     <a:lnT w="9525" cap="flat" cmpd="sng" algn="ctr">
                       <a:solidFill>
-                        <a:srgbClr val="C6992F"/>
+                        <a:srgbClr val="DFAD3A"/>
                       </a:solidFill>
                       <a:prstDash val="solid"/>
                     </a:lnT>
                     <a:lnB w="9525" cap="flat" cmpd="sng" algn="ctr">
                       <a:solidFill>
-                        <a:srgbClr val="C6992F"/>
+                        <a:srgbClr val="DFAD3A"/>
                       </a:solidFill>
                       <a:prstDash val="solid"/>
                     </a:lnB>
                     <a:solidFill>
-                      <a:srgbClr val="C6992F"/>
+                      <a:srgbClr val="DFAD3A"/>
                     </a:solidFill>
                   </a:tcPr>
                 </a:tc>
@@ -6328,30 +6328,30 @@
                   <a:tcPr anchor="ctr" marL="73152" marR="73152">
                     <a:lnL w="9525" cap="flat" cmpd="sng" algn="ctr">
                       <a:solidFill>
-                        <a:srgbClr val="C6992F"/>
+                        <a:srgbClr val="DFAD3A"/>
                       </a:solidFill>
                       <a:prstDash val="solid"/>
                     </a:lnL>
                     <a:lnR w="9525" cap="flat" cmpd="sng" algn="ctr">
                       <a:solidFill>
-                        <a:srgbClr val="C6992F"/>
+                        <a:srgbClr val="DFAD3A"/>
                       </a:solidFill>
                       <a:prstDash val="solid"/>
                     </a:lnR>
                     <a:lnT w="9525" cap="flat" cmpd="sng" algn="ctr">
                       <a:solidFill>
-                        <a:srgbClr val="C6992F"/>
+                        <a:srgbClr val="DFAD3A"/>
                       </a:solidFill>
                       <a:prstDash val="solid"/>
                     </a:lnT>
                     <a:lnB w="9525" cap="flat" cmpd="sng" algn="ctr">
                       <a:solidFill>
-                        <a:srgbClr val="C6992F"/>
+                        <a:srgbClr val="DFAD3A"/>
                       </a:solidFill>
                       <a:prstDash val="solid"/>
                     </a:lnB>
                     <a:solidFill>
-                      <a:srgbClr val="C6992F"/>
+                      <a:srgbClr val="DFAD3A"/>
                     </a:solidFill>
                   </a:tcPr>
                 </a:tc>
@@ -6374,30 +6374,30 @@
                   <a:tcPr anchor="ctr" marL="73152" marR="73152">
                     <a:lnL w="9525" cap="flat" cmpd="sng" algn="ctr">
                       <a:solidFill>
-                        <a:srgbClr val="C6992F"/>
+                        <a:srgbClr val="DFAD3A"/>
                       </a:solidFill>
                       <a:prstDash val="solid"/>
                     </a:lnL>
                     <a:lnR w="9525" cap="flat" cmpd="sng" algn="ctr">
                       <a:solidFill>
-                        <a:srgbClr val="C6992F"/>
+                        <a:srgbClr val="DFAD3A"/>
                       </a:solidFill>
                       <a:prstDash val="solid"/>
                     </a:lnR>
                     <a:lnT w="9525" cap="flat" cmpd="sng" algn="ctr">
                       <a:solidFill>
-                        <a:srgbClr val="C6992F"/>
+                        <a:srgbClr val="DFAD3A"/>
                       </a:solidFill>
                       <a:prstDash val="solid"/>
                     </a:lnT>
                     <a:lnB w="9525" cap="flat" cmpd="sng" algn="ctr">
                       <a:solidFill>
-                        <a:srgbClr val="C6992F"/>
+                        <a:srgbClr val="DFAD3A"/>
                       </a:solidFill>
                       <a:prstDash val="solid"/>
                     </a:lnB>
                     <a:solidFill>
-                      <a:srgbClr val="C6992F"/>
+                      <a:srgbClr val="DFAD3A"/>
                     </a:solidFill>
                   </a:tcPr>
                 </a:tc>
@@ -6412,7 +6412,7 @@
                       <a:r>
                         <a:rPr sz="1400" b="1">
                           <a:solidFill>
-                            <a:srgbClr val="74591B"/>
+                            <a:srgbClr val="72591D"/>
                           </a:solidFill>
                         </a:rPr>
                         <a:t>사망·재해</a:t>
@@ -6422,30 +6422,30 @@
                   <a:tcPr anchor="ctr" marL="73152" marR="73152">
                     <a:lnL w="9525" cap="flat" cmpd="sng" algn="ctr">
                       <a:solidFill>
-                        <a:srgbClr val="F5E9CC"/>
+                        <a:srgbClr val="F7EDD4"/>
                       </a:solidFill>
                       <a:prstDash val="solid"/>
                     </a:lnL>
                     <a:lnR w="9525" cap="flat" cmpd="sng" algn="ctr">
                       <a:solidFill>
-                        <a:srgbClr val="F5E9CC"/>
+                        <a:srgbClr val="F7EDD4"/>
                       </a:solidFill>
                       <a:prstDash val="solid"/>
                     </a:lnR>
                     <a:lnT w="9525" cap="flat" cmpd="sng" algn="ctr">
                       <a:solidFill>
-                        <a:srgbClr val="F5E9CC"/>
+                        <a:srgbClr val="F7EDD4"/>
                       </a:solidFill>
                       <a:prstDash val="solid"/>
                     </a:lnT>
                     <a:lnB w="9525" cap="flat" cmpd="sng" algn="ctr">
                       <a:solidFill>
-                        <a:srgbClr val="F5E9CC"/>
+                        <a:srgbClr val="F7EDD4"/>
                       </a:solidFill>
                       <a:prstDash val="solid"/>
                     </a:lnB>
                     <a:solidFill>
-                      <a:srgbClr val="F5E9CC"/>
+                      <a:srgbClr val="F7EDD4"/>
                     </a:solidFill>
                   </a:tcPr>
                 </a:tc>
@@ -6468,25 +6468,25 @@
                   <a:tcPr anchor="ctr" marL="73152" marR="73152">
                     <a:lnL w="9525" cap="flat" cmpd="sng" algn="ctr">
                       <a:solidFill>
-                        <a:srgbClr val="F5E9CC"/>
+                        <a:srgbClr val="F7EDD4"/>
                       </a:solidFill>
                       <a:prstDash val="solid"/>
                     </a:lnL>
                     <a:lnR w="9525" cap="flat" cmpd="sng" algn="ctr">
                       <a:solidFill>
-                        <a:srgbClr val="F5E9CC"/>
+                        <a:srgbClr val="F7EDD4"/>
                       </a:solidFill>
                       <a:prstDash val="solid"/>
                     </a:lnR>
                     <a:lnT w="9525" cap="flat" cmpd="sng" algn="ctr">
                       <a:solidFill>
-                        <a:srgbClr val="F5E9CC"/>
+                        <a:srgbClr val="F7EDD4"/>
                       </a:solidFill>
                       <a:prstDash val="solid"/>
                     </a:lnT>
                     <a:lnB w="9525" cap="flat" cmpd="sng" algn="ctr">
                       <a:solidFill>
-                        <a:srgbClr val="F5E9CC"/>
+                        <a:srgbClr val="F7EDD4"/>
                       </a:solidFill>
                       <a:prstDash val="solid"/>
                     </a:lnB>
@@ -6514,25 +6514,25 @@
                   <a:tcPr anchor="ctr" marL="73152" marR="73152">
                     <a:lnL w="9525" cap="flat" cmpd="sng" algn="ctr">
                       <a:solidFill>
-                        <a:srgbClr val="F5E9CC"/>
+                        <a:srgbClr val="F7EDD4"/>
                       </a:solidFill>
                       <a:prstDash val="solid"/>
                     </a:lnL>
                     <a:lnR w="9525" cap="flat" cmpd="sng" algn="ctr">
                       <a:solidFill>
-                        <a:srgbClr val="F5E9CC"/>
+                        <a:srgbClr val="F7EDD4"/>
                       </a:solidFill>
                       <a:prstDash val="solid"/>
                     </a:lnR>
                     <a:lnT w="9525" cap="flat" cmpd="sng" algn="ctr">
                       <a:solidFill>
-                        <a:srgbClr val="F5E9CC"/>
+                        <a:srgbClr val="F7EDD4"/>
                       </a:solidFill>
                       <a:prstDash val="solid"/>
                     </a:lnT>
                     <a:lnB w="9525" cap="flat" cmpd="sng" algn="ctr">
                       <a:solidFill>
-                        <a:srgbClr val="F5E9CC"/>
+                        <a:srgbClr val="F7EDD4"/>
                       </a:solidFill>
                       <a:prstDash val="solid"/>
                     </a:lnB>
@@ -6560,25 +6560,25 @@
                   <a:tcPr anchor="ctr" marL="73152" marR="73152">
                     <a:lnL w="9525" cap="flat" cmpd="sng" algn="ctr">
                       <a:solidFill>
-                        <a:srgbClr val="F5E9CC"/>
+                        <a:srgbClr val="F7EDD4"/>
                       </a:solidFill>
                       <a:prstDash val="solid"/>
                     </a:lnL>
                     <a:lnR w="9525" cap="flat" cmpd="sng" algn="ctr">
                       <a:solidFill>
-                        <a:srgbClr val="F5E9CC"/>
+                        <a:srgbClr val="F7EDD4"/>
                       </a:solidFill>
                       <a:prstDash val="solid"/>
                     </a:lnR>
                     <a:lnT w="9525" cap="flat" cmpd="sng" algn="ctr">
                       <a:solidFill>
-                        <a:srgbClr val="F5E9CC"/>
+                        <a:srgbClr val="F7EDD4"/>
                       </a:solidFill>
                       <a:prstDash val="solid"/>
                     </a:lnT>
                     <a:lnB w="9525" cap="flat" cmpd="sng" algn="ctr">
                       <a:solidFill>
-                        <a:srgbClr val="F5E9CC"/>
+                        <a:srgbClr val="F7EDD4"/>
                       </a:solidFill>
                       <a:prstDash val="solid"/>
                     </a:lnB>
@@ -6598,7 +6598,7 @@
                       <a:r>
                         <a:rPr sz="1400" b="1">
                           <a:solidFill>
-                            <a:srgbClr val="74591B"/>
+                            <a:srgbClr val="72591D"/>
                           </a:solidFill>
                         </a:rPr>
                         <a:t>질병 진단</a:t>
@@ -6608,30 +6608,30 @@
                   <a:tcPr anchor="ctr" marL="73152" marR="73152">
                     <a:lnL w="9525" cap="flat" cmpd="sng" algn="ctr">
                       <a:solidFill>
-                        <a:srgbClr val="F5E9CC"/>
+                        <a:srgbClr val="F7EDD4"/>
                       </a:solidFill>
                       <a:prstDash val="solid"/>
                     </a:lnL>
                     <a:lnR w="9525" cap="flat" cmpd="sng" algn="ctr">
                       <a:solidFill>
-                        <a:srgbClr val="F5E9CC"/>
+                        <a:srgbClr val="F7EDD4"/>
                       </a:solidFill>
                       <a:prstDash val="solid"/>
                     </a:lnR>
                     <a:lnT w="9525" cap="flat" cmpd="sng" algn="ctr">
                       <a:solidFill>
-                        <a:srgbClr val="F5E9CC"/>
+                        <a:srgbClr val="F7EDD4"/>
                       </a:solidFill>
                       <a:prstDash val="solid"/>
                     </a:lnT>
                     <a:lnB w="9525" cap="flat" cmpd="sng" algn="ctr">
                       <a:solidFill>
-                        <a:srgbClr val="F5E9CC"/>
+                        <a:srgbClr val="F7EDD4"/>
                       </a:solidFill>
                       <a:prstDash val="solid"/>
                     </a:lnB>
                     <a:solidFill>
-                      <a:srgbClr val="F5E9CC"/>
+                      <a:srgbClr val="F7EDD4"/>
                     </a:solidFill>
                   </a:tcPr>
                 </a:tc>
@@ -6654,30 +6654,30 @@
                   <a:tcPr anchor="ctr" marL="73152" marR="73152">
                     <a:lnL w="9525" cap="flat" cmpd="sng" algn="ctr">
                       <a:solidFill>
-                        <a:srgbClr val="F5E9CC"/>
+                        <a:srgbClr val="F7EDD4"/>
                       </a:solidFill>
                       <a:prstDash val="solid"/>
                     </a:lnL>
                     <a:lnR w="9525" cap="flat" cmpd="sng" algn="ctr">
                       <a:solidFill>
-                        <a:srgbClr val="F5E9CC"/>
+                        <a:srgbClr val="F7EDD4"/>
                       </a:solidFill>
                       <a:prstDash val="solid"/>
                     </a:lnR>
                     <a:lnT w="9525" cap="flat" cmpd="sng" algn="ctr">
                       <a:solidFill>
-                        <a:srgbClr val="F5E9CC"/>
+                        <a:srgbClr val="F7EDD4"/>
                       </a:solidFill>
                       <a:prstDash val="solid"/>
                     </a:lnT>
                     <a:lnB w="9525" cap="flat" cmpd="sng" algn="ctr">
                       <a:solidFill>
-                        <a:srgbClr val="F5E9CC"/>
+                        <a:srgbClr val="F7EDD4"/>
                       </a:solidFill>
                       <a:prstDash val="solid"/>
                     </a:lnB>
                     <a:solidFill>
-                      <a:srgbClr val="FBF7EE"/>
+                      <a:srgbClr val="FCF9F3"/>
                     </a:solidFill>
                   </a:tcPr>
                 </a:tc>
@@ -6700,30 +6700,30 @@
                   <a:tcPr anchor="ctr" marL="73152" marR="73152">
                     <a:lnL w="9525" cap="flat" cmpd="sng" algn="ctr">
                       <a:solidFill>
-                        <a:srgbClr val="F5E9CC"/>
+                        <a:srgbClr val="F7EDD4"/>
                       </a:solidFill>
                       <a:prstDash val="solid"/>
                     </a:lnL>
                     <a:lnR w="9525" cap="flat" cmpd="sng" algn="ctr">
                       <a:solidFill>
-                        <a:srgbClr val="F5E9CC"/>
+                        <a:srgbClr val="F7EDD4"/>
                       </a:solidFill>
                       <a:prstDash val="solid"/>
                     </a:lnR>
                     <a:lnT w="9525" cap="flat" cmpd="sng" algn="ctr">
                       <a:solidFill>
-                        <a:srgbClr val="F5E9CC"/>
+                        <a:srgbClr val="F7EDD4"/>
                       </a:solidFill>
                       <a:prstDash val="solid"/>
                     </a:lnT>
                     <a:lnB w="9525" cap="flat" cmpd="sng" algn="ctr">
                       <a:solidFill>
-                        <a:srgbClr val="F5E9CC"/>
+                        <a:srgbClr val="F7EDD4"/>
                       </a:solidFill>
                       <a:prstDash val="solid"/>
                     </a:lnB>
                     <a:solidFill>
-                      <a:srgbClr val="FBF7EE"/>
+                      <a:srgbClr val="FCF9F3"/>
                     </a:solidFill>
                   </a:tcPr>
                 </a:tc>
@@ -6746,30 +6746,30 @@
                   <a:tcPr anchor="ctr" marL="73152" marR="73152">
                     <a:lnL w="9525" cap="flat" cmpd="sng" algn="ctr">
                       <a:solidFill>
-                        <a:srgbClr val="F5E9CC"/>
+                        <a:srgbClr val="F7EDD4"/>
                       </a:solidFill>
                       <a:prstDash val="solid"/>
                     </a:lnL>
                     <a:lnR w="9525" cap="flat" cmpd="sng" algn="ctr">
                       <a:solidFill>
-                        <a:srgbClr val="F5E9CC"/>
+                        <a:srgbClr val="F7EDD4"/>
                       </a:solidFill>
                       <a:prstDash val="solid"/>
                     </a:lnR>
                     <a:lnT w="9525" cap="flat" cmpd="sng" algn="ctr">
                       <a:solidFill>
-                        <a:srgbClr val="F5E9CC"/>
+                        <a:srgbClr val="F7EDD4"/>
                       </a:solidFill>
                       <a:prstDash val="solid"/>
                     </a:lnT>
                     <a:lnB w="9525" cap="flat" cmpd="sng" algn="ctr">
                       <a:solidFill>
-                        <a:srgbClr val="F5E9CC"/>
+                        <a:srgbClr val="F7EDD4"/>
                       </a:solidFill>
                       <a:prstDash val="solid"/>
                     </a:lnB>
                     <a:solidFill>
-                      <a:srgbClr val="FBF7EE"/>
+                      <a:srgbClr val="FCF9F3"/>
                     </a:solidFill>
                   </a:tcPr>
                 </a:tc>
@@ -6784,7 +6784,7 @@
                       <a:r>
                         <a:rPr sz="1400" b="1">
                           <a:solidFill>
-                            <a:srgbClr val="74591B"/>
+                            <a:srgbClr val="72591D"/>
                           </a:solidFill>
                         </a:rPr>
                         <a:t>암</a:t>
@@ -6794,30 +6794,30 @@
                   <a:tcPr anchor="ctr" marL="73152" marR="73152">
                     <a:lnL w="9525" cap="flat" cmpd="sng" algn="ctr">
                       <a:solidFill>
-                        <a:srgbClr val="F5E9CC"/>
+                        <a:srgbClr val="F7EDD4"/>
                       </a:solidFill>
                       <a:prstDash val="solid"/>
                     </a:lnL>
                     <a:lnR w="9525" cap="flat" cmpd="sng" algn="ctr">
                       <a:solidFill>
-                        <a:srgbClr val="F5E9CC"/>
+                        <a:srgbClr val="F7EDD4"/>
                       </a:solidFill>
                       <a:prstDash val="solid"/>
                     </a:lnR>
                     <a:lnT w="9525" cap="flat" cmpd="sng" algn="ctr">
                       <a:solidFill>
-                        <a:srgbClr val="F5E9CC"/>
+                        <a:srgbClr val="F7EDD4"/>
                       </a:solidFill>
                       <a:prstDash val="solid"/>
                     </a:lnT>
                     <a:lnB w="9525" cap="flat" cmpd="sng" algn="ctr">
                       <a:solidFill>
-                        <a:srgbClr val="F5E9CC"/>
+                        <a:srgbClr val="F7EDD4"/>
                       </a:solidFill>
                       <a:prstDash val="solid"/>
                     </a:lnB>
                     <a:solidFill>
-                      <a:srgbClr val="F5E9CC"/>
+                      <a:srgbClr val="F7EDD4"/>
                     </a:solidFill>
                   </a:tcPr>
                 </a:tc>
@@ -6840,25 +6840,25 @@
                   <a:tcPr anchor="ctr" marL="73152" marR="73152">
                     <a:lnL w="9525" cap="flat" cmpd="sng" algn="ctr">
                       <a:solidFill>
-                        <a:srgbClr val="F5E9CC"/>
+                        <a:srgbClr val="F7EDD4"/>
                       </a:solidFill>
                       <a:prstDash val="solid"/>
                     </a:lnL>
                     <a:lnR w="9525" cap="flat" cmpd="sng" algn="ctr">
                       <a:solidFill>
-                        <a:srgbClr val="F5E9CC"/>
+                        <a:srgbClr val="F7EDD4"/>
                       </a:solidFill>
                       <a:prstDash val="solid"/>
                     </a:lnR>
                     <a:lnT w="9525" cap="flat" cmpd="sng" algn="ctr">
                       <a:solidFill>
-                        <a:srgbClr val="F5E9CC"/>
+                        <a:srgbClr val="F7EDD4"/>
                       </a:solidFill>
                       <a:prstDash val="solid"/>
                     </a:lnT>
                     <a:lnB w="9525" cap="flat" cmpd="sng" algn="ctr">
                       <a:solidFill>
-                        <a:srgbClr val="F5E9CC"/>
+                        <a:srgbClr val="F7EDD4"/>
                       </a:solidFill>
                       <a:prstDash val="solid"/>
                     </a:lnB>
@@ -6886,25 +6886,25 @@
                   <a:tcPr anchor="ctr" marL="73152" marR="73152">
                     <a:lnL w="9525" cap="flat" cmpd="sng" algn="ctr">
                       <a:solidFill>
-                        <a:srgbClr val="F5E9CC"/>
+                        <a:srgbClr val="F7EDD4"/>
                       </a:solidFill>
                       <a:prstDash val="solid"/>
                     </a:lnL>
                     <a:lnR w="9525" cap="flat" cmpd="sng" algn="ctr">
                       <a:solidFill>
-                        <a:srgbClr val="F5E9CC"/>
+                        <a:srgbClr val="F7EDD4"/>
                       </a:solidFill>
                       <a:prstDash val="solid"/>
                     </a:lnR>
                     <a:lnT w="9525" cap="flat" cmpd="sng" algn="ctr">
                       <a:solidFill>
-                        <a:srgbClr val="F5E9CC"/>
+                        <a:srgbClr val="F7EDD4"/>
                       </a:solidFill>
                       <a:prstDash val="solid"/>
                     </a:lnT>
                     <a:lnB w="9525" cap="flat" cmpd="sng" algn="ctr">
                       <a:solidFill>
-                        <a:srgbClr val="F5E9CC"/>
+                        <a:srgbClr val="F7EDD4"/>
                       </a:solidFill>
                       <a:prstDash val="solid"/>
                     </a:lnB>
@@ -6932,25 +6932,25 @@
                   <a:tcPr anchor="ctr" marL="73152" marR="73152">
                     <a:lnL w="9525" cap="flat" cmpd="sng" algn="ctr">
                       <a:solidFill>
-                        <a:srgbClr val="F5E9CC"/>
+                        <a:srgbClr val="F7EDD4"/>
                       </a:solidFill>
                       <a:prstDash val="solid"/>
                     </a:lnL>
                     <a:lnR w="9525" cap="flat" cmpd="sng" algn="ctr">
                       <a:solidFill>
-                        <a:srgbClr val="F5E9CC"/>
+                        <a:srgbClr val="F7EDD4"/>
                       </a:solidFill>
                       <a:prstDash val="solid"/>
                     </a:lnR>
                     <a:lnT w="9525" cap="flat" cmpd="sng" algn="ctr">
                       <a:solidFill>
-                        <a:srgbClr val="F5E9CC"/>
+                        <a:srgbClr val="F7EDD4"/>
                       </a:solidFill>
                       <a:prstDash val="solid"/>
                     </a:lnT>
                     <a:lnB w="9525" cap="flat" cmpd="sng" algn="ctr">
                       <a:solidFill>
-                        <a:srgbClr val="F5E9CC"/>
+                        <a:srgbClr val="F7EDD4"/>
                       </a:solidFill>
                       <a:prstDash val="solid"/>
                     </a:lnB>
@@ -6970,7 +6970,7 @@
                       <a:r>
                         <a:rPr sz="1400" b="1">
                           <a:solidFill>
-                            <a:srgbClr val="74591B"/>
+                            <a:srgbClr val="72591D"/>
                           </a:solidFill>
                         </a:rPr>
                         <a:t>뇌·심장</a:t>
@@ -6980,30 +6980,30 @@
                   <a:tcPr anchor="ctr" marL="73152" marR="73152">
                     <a:lnL w="9525" cap="flat" cmpd="sng" algn="ctr">
                       <a:solidFill>
-                        <a:srgbClr val="F5E9CC"/>
+                        <a:srgbClr val="F7EDD4"/>
                       </a:solidFill>
                       <a:prstDash val="solid"/>
                     </a:lnL>
                     <a:lnR w="9525" cap="flat" cmpd="sng" algn="ctr">
                       <a:solidFill>
-                        <a:srgbClr val="F5E9CC"/>
+                        <a:srgbClr val="F7EDD4"/>
                       </a:solidFill>
                       <a:prstDash val="solid"/>
                     </a:lnR>
                     <a:lnT w="9525" cap="flat" cmpd="sng" algn="ctr">
                       <a:solidFill>
-                        <a:srgbClr val="F5E9CC"/>
+                        <a:srgbClr val="F7EDD4"/>
                       </a:solidFill>
                       <a:prstDash val="solid"/>
                     </a:lnT>
                     <a:lnB w="9525" cap="flat" cmpd="sng" algn="ctr">
                       <a:solidFill>
-                        <a:srgbClr val="F5E9CC"/>
+                        <a:srgbClr val="F7EDD4"/>
                       </a:solidFill>
                       <a:prstDash val="solid"/>
                     </a:lnB>
                     <a:solidFill>
-                      <a:srgbClr val="F5E9CC"/>
+                      <a:srgbClr val="F7EDD4"/>
                     </a:solidFill>
                   </a:tcPr>
                 </a:tc>
@@ -7026,30 +7026,30 @@
                   <a:tcPr anchor="ctr" marL="73152" marR="73152">
                     <a:lnL w="9525" cap="flat" cmpd="sng" algn="ctr">
                       <a:solidFill>
-                        <a:srgbClr val="F5E9CC"/>
+                        <a:srgbClr val="F7EDD4"/>
                       </a:solidFill>
                       <a:prstDash val="solid"/>
                     </a:lnL>
                     <a:lnR w="9525" cap="flat" cmpd="sng" algn="ctr">
                       <a:solidFill>
-                        <a:srgbClr val="F5E9CC"/>
+                        <a:srgbClr val="F7EDD4"/>
                       </a:solidFill>
                       <a:prstDash val="solid"/>
                     </a:lnR>
                     <a:lnT w="9525" cap="flat" cmpd="sng" algn="ctr">
                       <a:solidFill>
-                        <a:srgbClr val="F5E9CC"/>
+                        <a:srgbClr val="F7EDD4"/>
                       </a:solidFill>
                       <a:prstDash val="solid"/>
                     </a:lnT>
                     <a:lnB w="9525" cap="flat" cmpd="sng" algn="ctr">
                       <a:solidFill>
-                        <a:srgbClr val="F5E9CC"/>
+                        <a:srgbClr val="F7EDD4"/>
                       </a:solidFill>
                       <a:prstDash val="solid"/>
                     </a:lnB>
                     <a:solidFill>
-                      <a:srgbClr val="FBF7EE"/>
+                      <a:srgbClr val="FCF9F3"/>
                     </a:solidFill>
                   </a:tcPr>
                 </a:tc>
@@ -7072,30 +7072,30 @@
                   <a:tcPr anchor="ctr" marL="73152" marR="73152">
                     <a:lnL w="9525" cap="flat" cmpd="sng" algn="ctr">
                       <a:solidFill>
-                        <a:srgbClr val="F5E9CC"/>
+                        <a:srgbClr val="F7EDD4"/>
                       </a:solidFill>
                       <a:prstDash val="solid"/>
                     </a:lnL>
                     <a:lnR w="9525" cap="flat" cmpd="sng" algn="ctr">
                       <a:solidFill>
-                        <a:srgbClr val="F5E9CC"/>
+                        <a:srgbClr val="F7EDD4"/>
                       </a:solidFill>
                       <a:prstDash val="solid"/>
                     </a:lnR>
                     <a:lnT w="9525" cap="flat" cmpd="sng" algn="ctr">
                       <a:solidFill>
-                        <a:srgbClr val="F5E9CC"/>
+                        <a:srgbClr val="F7EDD4"/>
                       </a:solidFill>
                       <a:prstDash val="solid"/>
                     </a:lnT>
                     <a:lnB w="9525" cap="flat" cmpd="sng" algn="ctr">
                       <a:solidFill>
-                        <a:srgbClr val="F5E9CC"/>
+                        <a:srgbClr val="F7EDD4"/>
                       </a:solidFill>
                       <a:prstDash val="solid"/>
                     </a:lnB>
                     <a:solidFill>
-                      <a:srgbClr val="FBF7EE"/>
+                      <a:srgbClr val="FCF9F3"/>
                     </a:solidFill>
                   </a:tcPr>
                 </a:tc>
@@ -7118,30 +7118,30 @@
                   <a:tcPr anchor="ctr" marL="73152" marR="73152">
                     <a:lnL w="9525" cap="flat" cmpd="sng" algn="ctr">
                       <a:solidFill>
-                        <a:srgbClr val="F5E9CC"/>
+                        <a:srgbClr val="F7EDD4"/>
                       </a:solidFill>
                       <a:prstDash val="solid"/>
                     </a:lnL>
                     <a:lnR w="9525" cap="flat" cmpd="sng" algn="ctr">
                       <a:solidFill>
-                        <a:srgbClr val="F5E9CC"/>
+                        <a:srgbClr val="F7EDD4"/>
                       </a:solidFill>
                       <a:prstDash val="solid"/>
                     </a:lnR>
                     <a:lnT w="9525" cap="flat" cmpd="sng" algn="ctr">
                       <a:solidFill>
-                        <a:srgbClr val="F5E9CC"/>
+                        <a:srgbClr val="F7EDD4"/>
                       </a:solidFill>
                       <a:prstDash val="solid"/>
                     </a:lnT>
                     <a:lnB w="9525" cap="flat" cmpd="sng" algn="ctr">
                       <a:solidFill>
-                        <a:srgbClr val="F5E9CC"/>
+                        <a:srgbClr val="F7EDD4"/>
                       </a:solidFill>
                       <a:prstDash val="solid"/>
                     </a:lnB>
                     <a:solidFill>
-                      <a:srgbClr val="FBF7EE"/>
+                      <a:srgbClr val="FCF9F3"/>
                     </a:solidFill>
                   </a:tcPr>
                 </a:tc>
@@ -7156,7 +7156,7 @@
                       <a:r>
                         <a:rPr sz="1400" b="1">
                           <a:solidFill>
-                            <a:srgbClr val="74591B"/>
+                            <a:srgbClr val="72591D"/>
                           </a:solidFill>
                         </a:rPr>
                         <a:t>입원·수술</a:t>
@@ -7166,30 +7166,30 @@
                   <a:tcPr anchor="ctr" marL="73152" marR="73152">
                     <a:lnL w="9525" cap="flat" cmpd="sng" algn="ctr">
                       <a:solidFill>
-                        <a:srgbClr val="F5E9CC"/>
+                        <a:srgbClr val="F7EDD4"/>
                       </a:solidFill>
                       <a:prstDash val="solid"/>
                     </a:lnL>
                     <a:lnR w="9525" cap="flat" cmpd="sng" algn="ctr">
                       <a:solidFill>
-                        <a:srgbClr val="F5E9CC"/>
+                        <a:srgbClr val="F7EDD4"/>
                       </a:solidFill>
                       <a:prstDash val="solid"/>
                     </a:lnR>
                     <a:lnT w="9525" cap="flat" cmpd="sng" algn="ctr">
                       <a:solidFill>
-                        <a:srgbClr val="F5E9CC"/>
+                        <a:srgbClr val="F7EDD4"/>
                       </a:solidFill>
                       <a:prstDash val="solid"/>
                     </a:lnT>
                     <a:lnB w="9525" cap="flat" cmpd="sng" algn="ctr">
                       <a:solidFill>
-                        <a:srgbClr val="F5E9CC"/>
+                        <a:srgbClr val="F7EDD4"/>
                       </a:solidFill>
                       <a:prstDash val="solid"/>
                     </a:lnB>
                     <a:solidFill>
-                      <a:srgbClr val="F5E9CC"/>
+                      <a:srgbClr val="F7EDD4"/>
                     </a:solidFill>
                   </a:tcPr>
                 </a:tc>
@@ -7212,25 +7212,25 @@
                   <a:tcPr anchor="ctr" marL="73152" marR="73152">
                     <a:lnL w="9525" cap="flat" cmpd="sng" algn="ctr">
                       <a:solidFill>
-                        <a:srgbClr val="F5E9CC"/>
+                        <a:srgbClr val="F7EDD4"/>
                       </a:solidFill>
                       <a:prstDash val="solid"/>
                     </a:lnL>
                     <a:lnR w="9525" cap="flat" cmpd="sng" algn="ctr">
                       <a:solidFill>
-                        <a:srgbClr val="F5E9CC"/>
+                        <a:srgbClr val="F7EDD4"/>
                       </a:solidFill>
                       <a:prstDash val="solid"/>
                     </a:lnR>
                     <a:lnT w="9525" cap="flat" cmpd="sng" algn="ctr">
                       <a:solidFill>
-                        <a:srgbClr val="F5E9CC"/>
+                        <a:srgbClr val="F7EDD4"/>
                       </a:solidFill>
                       <a:prstDash val="solid"/>
                     </a:lnT>
                     <a:lnB w="9525" cap="flat" cmpd="sng" algn="ctr">
                       <a:solidFill>
-                        <a:srgbClr val="F5E9CC"/>
+                        <a:srgbClr val="F7EDD4"/>
                       </a:solidFill>
                       <a:prstDash val="solid"/>
                     </a:lnB>
@@ -7258,25 +7258,25 @@
                   <a:tcPr anchor="ctr" marL="73152" marR="73152">
                     <a:lnL w="9525" cap="flat" cmpd="sng" algn="ctr">
                       <a:solidFill>
-                        <a:srgbClr val="F5E9CC"/>
+                        <a:srgbClr val="F7EDD4"/>
                       </a:solidFill>
                       <a:prstDash val="solid"/>
                     </a:lnL>
                     <a:lnR w="9525" cap="flat" cmpd="sng" algn="ctr">
                       <a:solidFill>
-                        <a:srgbClr val="F5E9CC"/>
+                        <a:srgbClr val="F7EDD4"/>
                       </a:solidFill>
                       <a:prstDash val="solid"/>
                     </a:lnR>
                     <a:lnT w="9525" cap="flat" cmpd="sng" algn="ctr">
                       <a:solidFill>
-                        <a:srgbClr val="F5E9CC"/>
+                        <a:srgbClr val="F7EDD4"/>
                       </a:solidFill>
                       <a:prstDash val="solid"/>
                     </a:lnT>
                     <a:lnB w="9525" cap="flat" cmpd="sng" algn="ctr">
                       <a:solidFill>
-                        <a:srgbClr val="F5E9CC"/>
+                        <a:srgbClr val="F7EDD4"/>
                       </a:solidFill>
                       <a:prstDash val="solid"/>
                     </a:lnB>
@@ -7304,25 +7304,25 @@
                   <a:tcPr anchor="ctr" marL="73152" marR="73152">
                     <a:lnL w="9525" cap="flat" cmpd="sng" algn="ctr">
                       <a:solidFill>
-                        <a:srgbClr val="F5E9CC"/>
+                        <a:srgbClr val="F7EDD4"/>
                       </a:solidFill>
                       <a:prstDash val="solid"/>
                     </a:lnL>
                     <a:lnR w="9525" cap="flat" cmpd="sng" algn="ctr">
                       <a:solidFill>
-                        <a:srgbClr val="F5E9CC"/>
+                        <a:srgbClr val="F7EDD4"/>
                       </a:solidFill>
                       <a:prstDash val="solid"/>
                     </a:lnR>
                     <a:lnT w="9525" cap="flat" cmpd="sng" algn="ctr">
                       <a:solidFill>
-                        <a:srgbClr val="F5E9CC"/>
+                        <a:srgbClr val="F7EDD4"/>
                       </a:solidFill>
                       <a:prstDash val="solid"/>
                     </a:lnT>
                     <a:lnB w="9525" cap="flat" cmpd="sng" algn="ctr">
                       <a:solidFill>
-                        <a:srgbClr val="F5E9CC"/>
+                        <a:srgbClr val="F7EDD4"/>
                       </a:solidFill>
                       <a:prstDash val="solid"/>
                     </a:lnB>
@@ -7342,7 +7342,7 @@
                       <a:r>
                         <a:rPr sz="1400" b="1">
                           <a:solidFill>
-                            <a:srgbClr val="74591B"/>
+                            <a:srgbClr val="72591D"/>
                           </a:solidFill>
                         </a:rPr>
                         <a:t>상해</a:t>
@@ -7352,30 +7352,30 @@
                   <a:tcPr anchor="ctr" marL="73152" marR="73152">
                     <a:lnL w="9525" cap="flat" cmpd="sng" algn="ctr">
                       <a:solidFill>
-                        <a:srgbClr val="F5E9CC"/>
+                        <a:srgbClr val="F7EDD4"/>
                       </a:solidFill>
                       <a:prstDash val="solid"/>
                     </a:lnL>
                     <a:lnR w="9525" cap="flat" cmpd="sng" algn="ctr">
                       <a:solidFill>
-                        <a:srgbClr val="F5E9CC"/>
+                        <a:srgbClr val="F7EDD4"/>
                       </a:solidFill>
                       <a:prstDash val="solid"/>
                     </a:lnR>
                     <a:lnT w="9525" cap="flat" cmpd="sng" algn="ctr">
                       <a:solidFill>
-                        <a:srgbClr val="F5E9CC"/>
+                        <a:srgbClr val="F7EDD4"/>
                       </a:solidFill>
                       <a:prstDash val="solid"/>
                     </a:lnT>
                     <a:lnB w="9525" cap="flat" cmpd="sng" algn="ctr">
                       <a:solidFill>
-                        <a:srgbClr val="F5E9CC"/>
+                        <a:srgbClr val="F7EDD4"/>
                       </a:solidFill>
                       <a:prstDash val="solid"/>
                     </a:lnB>
                     <a:solidFill>
-                      <a:srgbClr val="F5E9CC"/>
+                      <a:srgbClr val="F7EDD4"/>
                     </a:solidFill>
                   </a:tcPr>
                 </a:tc>
@@ -7398,30 +7398,30 @@
                   <a:tcPr anchor="ctr" marL="73152" marR="73152">
                     <a:lnL w="9525" cap="flat" cmpd="sng" algn="ctr">
                       <a:solidFill>
-                        <a:srgbClr val="F5E9CC"/>
+                        <a:srgbClr val="F7EDD4"/>
                       </a:solidFill>
                       <a:prstDash val="solid"/>
                     </a:lnL>
                     <a:lnR w="9525" cap="flat" cmpd="sng" algn="ctr">
                       <a:solidFill>
-                        <a:srgbClr val="F5E9CC"/>
+                        <a:srgbClr val="F7EDD4"/>
                       </a:solidFill>
                       <a:prstDash val="solid"/>
                     </a:lnR>
                     <a:lnT w="9525" cap="flat" cmpd="sng" algn="ctr">
                       <a:solidFill>
-                        <a:srgbClr val="F5E9CC"/>
+                        <a:srgbClr val="F7EDD4"/>
                       </a:solidFill>
                       <a:prstDash val="solid"/>
                     </a:lnT>
                     <a:lnB w="9525" cap="flat" cmpd="sng" algn="ctr">
                       <a:solidFill>
-                        <a:srgbClr val="F5E9CC"/>
+                        <a:srgbClr val="F7EDD4"/>
                       </a:solidFill>
                       <a:prstDash val="solid"/>
                     </a:lnB>
                     <a:solidFill>
-                      <a:srgbClr val="FBF7EE"/>
+                      <a:srgbClr val="FCF9F3"/>
                     </a:solidFill>
                   </a:tcPr>
                 </a:tc>
@@ -7444,30 +7444,30 @@
                   <a:tcPr anchor="ctr" marL="73152" marR="73152">
                     <a:lnL w="9525" cap="flat" cmpd="sng" algn="ctr">
                       <a:solidFill>
-                        <a:srgbClr val="F5E9CC"/>
+                        <a:srgbClr val="F7EDD4"/>
                       </a:solidFill>
                       <a:prstDash val="solid"/>
                     </a:lnL>
                     <a:lnR w="9525" cap="flat" cmpd="sng" algn="ctr">
                       <a:solidFill>
-                        <a:srgbClr val="F5E9CC"/>
+                        <a:srgbClr val="F7EDD4"/>
                       </a:solidFill>
                       <a:prstDash val="solid"/>
                     </a:lnR>
                     <a:lnT w="9525" cap="flat" cmpd="sng" algn="ctr">
                       <a:solidFill>
-                        <a:srgbClr val="F5E9CC"/>
+                        <a:srgbClr val="F7EDD4"/>
                       </a:solidFill>
                       <a:prstDash val="solid"/>
                     </a:lnT>
                     <a:lnB w="9525" cap="flat" cmpd="sng" algn="ctr">
                       <a:solidFill>
-                        <a:srgbClr val="F5E9CC"/>
+                        <a:srgbClr val="F7EDD4"/>
                       </a:solidFill>
                       <a:prstDash val="solid"/>
                     </a:lnB>
                     <a:solidFill>
-                      <a:srgbClr val="FBF7EE"/>
+                      <a:srgbClr val="FCF9F3"/>
                     </a:solidFill>
                   </a:tcPr>
                 </a:tc>
@@ -7490,30 +7490,30 @@
                   <a:tcPr anchor="ctr" marL="73152" marR="73152">
                     <a:lnL w="9525" cap="flat" cmpd="sng" algn="ctr">
                       <a:solidFill>
-                        <a:srgbClr val="F5E9CC"/>
+                        <a:srgbClr val="F7EDD4"/>
                       </a:solidFill>
                       <a:prstDash val="solid"/>
                     </a:lnL>
                     <a:lnR w="9525" cap="flat" cmpd="sng" algn="ctr">
                       <a:solidFill>
-                        <a:srgbClr val="F5E9CC"/>
+                        <a:srgbClr val="F7EDD4"/>
                       </a:solidFill>
                       <a:prstDash val="solid"/>
                     </a:lnR>
                     <a:lnT w="9525" cap="flat" cmpd="sng" algn="ctr">
                       <a:solidFill>
-                        <a:srgbClr val="F5E9CC"/>
+                        <a:srgbClr val="F7EDD4"/>
                       </a:solidFill>
                       <a:prstDash val="solid"/>
                     </a:lnT>
                     <a:lnB w="9525" cap="flat" cmpd="sng" algn="ctr">
                       <a:solidFill>
-                        <a:srgbClr val="F5E9CC"/>
+                        <a:srgbClr val="F7EDD4"/>
                       </a:solidFill>
                       <a:prstDash val="solid"/>
                     </a:lnB>
                     <a:solidFill>
-                      <a:srgbClr val="FBF7EE"/>
+                      <a:srgbClr val="FCF9F3"/>
                     </a:solidFill>
                   </a:tcPr>
                 </a:tc>
@@ -7528,7 +7528,7 @@
                       <a:r>
                         <a:rPr sz="1400" b="1">
                           <a:solidFill>
-                            <a:srgbClr val="74591B"/>
+                            <a:srgbClr val="72591D"/>
                           </a:solidFill>
                         </a:rPr>
                         <a:t>실손의료</a:t>
@@ -7538,30 +7538,30 @@
                   <a:tcPr anchor="ctr" marL="73152" marR="73152">
                     <a:lnL w="9525" cap="flat" cmpd="sng" algn="ctr">
                       <a:solidFill>
-                        <a:srgbClr val="F5E9CC"/>
+                        <a:srgbClr val="F7EDD4"/>
                       </a:solidFill>
                       <a:prstDash val="solid"/>
                     </a:lnL>
                     <a:lnR w="9525" cap="flat" cmpd="sng" algn="ctr">
                       <a:solidFill>
-                        <a:srgbClr val="F5E9CC"/>
+                        <a:srgbClr val="F7EDD4"/>
                       </a:solidFill>
                       <a:prstDash val="solid"/>
                     </a:lnR>
                     <a:lnT w="9525" cap="flat" cmpd="sng" algn="ctr">
                       <a:solidFill>
-                        <a:srgbClr val="F5E9CC"/>
+                        <a:srgbClr val="F7EDD4"/>
                       </a:solidFill>
                       <a:prstDash val="solid"/>
                     </a:lnT>
                     <a:lnB w="9525" cap="flat" cmpd="sng" algn="ctr">
                       <a:solidFill>
-                        <a:srgbClr val="F5E9CC"/>
+                        <a:srgbClr val="F7EDD4"/>
                       </a:solidFill>
                       <a:prstDash val="solid"/>
                     </a:lnB>
                     <a:solidFill>
-                      <a:srgbClr val="F5E9CC"/>
+                      <a:srgbClr val="F7EDD4"/>
                     </a:solidFill>
                   </a:tcPr>
                 </a:tc>
@@ -7584,25 +7584,25 @@
                   <a:tcPr anchor="ctr" marL="73152" marR="73152">
                     <a:lnL w="9525" cap="flat" cmpd="sng" algn="ctr">
                       <a:solidFill>
-                        <a:srgbClr val="F5E9CC"/>
+                        <a:srgbClr val="F7EDD4"/>
                       </a:solidFill>
                       <a:prstDash val="solid"/>
                     </a:lnL>
                     <a:lnR w="9525" cap="flat" cmpd="sng" algn="ctr">
                       <a:solidFill>
-                        <a:srgbClr val="F5E9CC"/>
+                        <a:srgbClr val="F7EDD4"/>
                       </a:solidFill>
                       <a:prstDash val="solid"/>
                     </a:lnR>
                     <a:lnT w="9525" cap="flat" cmpd="sng" algn="ctr">
                       <a:solidFill>
-                        <a:srgbClr val="F5E9CC"/>
+                        <a:srgbClr val="F7EDD4"/>
                       </a:solidFill>
                       <a:prstDash val="solid"/>
                     </a:lnT>
                     <a:lnB w="9525" cap="flat" cmpd="sng" algn="ctr">
                       <a:solidFill>
-                        <a:srgbClr val="F5E9CC"/>
+                        <a:srgbClr val="F7EDD4"/>
                       </a:solidFill>
                       <a:prstDash val="solid"/>
                     </a:lnB>
@@ -7630,25 +7630,25 @@
                   <a:tcPr anchor="ctr" marL="73152" marR="73152">
                     <a:lnL w="9525" cap="flat" cmpd="sng" algn="ctr">
                       <a:solidFill>
-                        <a:srgbClr val="F5E9CC"/>
+                        <a:srgbClr val="F7EDD4"/>
                       </a:solidFill>
                       <a:prstDash val="solid"/>
                     </a:lnL>
                     <a:lnR w="9525" cap="flat" cmpd="sng" algn="ctr">
                       <a:solidFill>
-                        <a:srgbClr val="F5E9CC"/>
+                        <a:srgbClr val="F7EDD4"/>
                       </a:solidFill>
                       <a:prstDash val="solid"/>
                     </a:lnR>
                     <a:lnT w="9525" cap="flat" cmpd="sng" algn="ctr">
                       <a:solidFill>
-                        <a:srgbClr val="F5E9CC"/>
+                        <a:srgbClr val="F7EDD4"/>
                       </a:solidFill>
                       <a:prstDash val="solid"/>
                     </a:lnT>
                     <a:lnB w="9525" cap="flat" cmpd="sng" algn="ctr">
                       <a:solidFill>
-                        <a:srgbClr val="F5E9CC"/>
+                        <a:srgbClr val="F7EDD4"/>
                       </a:solidFill>
                       <a:prstDash val="solid"/>
                     </a:lnB>
@@ -7676,25 +7676,25 @@
                   <a:tcPr anchor="ctr" marL="73152" marR="73152">
                     <a:lnL w="9525" cap="flat" cmpd="sng" algn="ctr">
                       <a:solidFill>
-                        <a:srgbClr val="F5E9CC"/>
+                        <a:srgbClr val="F7EDD4"/>
                       </a:solidFill>
                       <a:prstDash val="solid"/>
                     </a:lnL>
                     <a:lnR w="9525" cap="flat" cmpd="sng" algn="ctr">
                       <a:solidFill>
-                        <a:srgbClr val="F5E9CC"/>
+                        <a:srgbClr val="F7EDD4"/>
                       </a:solidFill>
                       <a:prstDash val="solid"/>
                     </a:lnR>
                     <a:lnT w="9525" cap="flat" cmpd="sng" algn="ctr">
                       <a:solidFill>
-                        <a:srgbClr val="F5E9CC"/>
+                        <a:srgbClr val="F7EDD4"/>
                       </a:solidFill>
                       <a:prstDash val="solid"/>
                     </a:lnT>
                     <a:lnB w="9525" cap="flat" cmpd="sng" algn="ctr">
                       <a:solidFill>
-                        <a:srgbClr val="F5E9CC"/>
+                        <a:srgbClr val="F7EDD4"/>
                       </a:solidFill>
                       <a:prstDash val="solid"/>
                     </a:lnB>
@@ -7714,7 +7714,7 @@
                       <a:r>
                         <a:rPr sz="1400" b="1">
                           <a:solidFill>
-                            <a:srgbClr val="74591B"/>
+                            <a:srgbClr val="72591D"/>
                           </a:solidFill>
                         </a:rPr>
                         <a:t>연금·노후자금</a:t>
@@ -7724,30 +7724,30 @@
                   <a:tcPr anchor="ctr" marL="73152" marR="73152">
                     <a:lnL w="9525" cap="flat" cmpd="sng" algn="ctr">
                       <a:solidFill>
-                        <a:srgbClr val="F5E9CC"/>
+                        <a:srgbClr val="F7EDD4"/>
                       </a:solidFill>
                       <a:prstDash val="solid"/>
                     </a:lnL>
                     <a:lnR w="9525" cap="flat" cmpd="sng" algn="ctr">
                       <a:solidFill>
-                        <a:srgbClr val="F5E9CC"/>
+                        <a:srgbClr val="F7EDD4"/>
                       </a:solidFill>
                       <a:prstDash val="solid"/>
                     </a:lnR>
                     <a:lnT w="9525" cap="flat" cmpd="sng" algn="ctr">
                       <a:solidFill>
-                        <a:srgbClr val="F5E9CC"/>
+                        <a:srgbClr val="F7EDD4"/>
                       </a:solidFill>
                       <a:prstDash val="solid"/>
                     </a:lnT>
                     <a:lnB w="9525" cap="flat" cmpd="sng" algn="ctr">
                       <a:solidFill>
-                        <a:srgbClr val="F5E9CC"/>
+                        <a:srgbClr val="F7EDD4"/>
                       </a:solidFill>
                       <a:prstDash val="solid"/>
                     </a:lnB>
                     <a:solidFill>
-                      <a:srgbClr val="F5E9CC"/>
+                      <a:srgbClr val="F7EDD4"/>
                     </a:solidFill>
                   </a:tcPr>
                 </a:tc>
@@ -7770,30 +7770,30 @@
                   <a:tcPr anchor="ctr" marL="73152" marR="73152">
                     <a:lnL w="9525" cap="flat" cmpd="sng" algn="ctr">
                       <a:solidFill>
-                        <a:srgbClr val="F5E9CC"/>
+                        <a:srgbClr val="F7EDD4"/>
                       </a:solidFill>
                       <a:prstDash val="solid"/>
                     </a:lnL>
                     <a:lnR w="9525" cap="flat" cmpd="sng" algn="ctr">
                       <a:solidFill>
-                        <a:srgbClr val="F5E9CC"/>
+                        <a:srgbClr val="F7EDD4"/>
                       </a:solidFill>
                       <a:prstDash val="solid"/>
                     </a:lnR>
                     <a:lnT w="9525" cap="flat" cmpd="sng" algn="ctr">
                       <a:solidFill>
-                        <a:srgbClr val="F5E9CC"/>
+                        <a:srgbClr val="F7EDD4"/>
                       </a:solidFill>
                       <a:prstDash val="solid"/>
                     </a:lnT>
                     <a:lnB w="9525" cap="flat" cmpd="sng" algn="ctr">
                       <a:solidFill>
-                        <a:srgbClr val="F5E9CC"/>
+                        <a:srgbClr val="F7EDD4"/>
                       </a:solidFill>
                       <a:prstDash val="solid"/>
                     </a:lnB>
                     <a:solidFill>
-                      <a:srgbClr val="FBF7EE"/>
+                      <a:srgbClr val="FCF9F3"/>
                     </a:solidFill>
                   </a:tcPr>
                 </a:tc>
@@ -7816,30 +7816,30 @@
                   <a:tcPr anchor="ctr" marL="73152" marR="73152">
                     <a:lnL w="9525" cap="flat" cmpd="sng" algn="ctr">
                       <a:solidFill>
-                        <a:srgbClr val="F5E9CC"/>
+                        <a:srgbClr val="F7EDD4"/>
                       </a:solidFill>
                       <a:prstDash val="solid"/>
                     </a:lnL>
                     <a:lnR w="9525" cap="flat" cmpd="sng" algn="ctr">
                       <a:solidFill>
-                        <a:srgbClr val="F5E9CC"/>
+                        <a:srgbClr val="F7EDD4"/>
                       </a:solidFill>
                       <a:prstDash val="solid"/>
                     </a:lnR>
                     <a:lnT w="9525" cap="flat" cmpd="sng" algn="ctr">
                       <a:solidFill>
-                        <a:srgbClr val="F5E9CC"/>
+                        <a:srgbClr val="F7EDD4"/>
                       </a:solidFill>
                       <a:prstDash val="solid"/>
                     </a:lnT>
                     <a:lnB w="9525" cap="flat" cmpd="sng" algn="ctr">
                       <a:solidFill>
-                        <a:srgbClr val="F5E9CC"/>
+                        <a:srgbClr val="F7EDD4"/>
                       </a:solidFill>
                       <a:prstDash val="solid"/>
                     </a:lnB>
                     <a:solidFill>
-                      <a:srgbClr val="FBF7EE"/>
+                      <a:srgbClr val="FCF9F3"/>
                     </a:solidFill>
                   </a:tcPr>
                 </a:tc>
@@ -7862,30 +7862,30 @@
                   <a:tcPr anchor="ctr" marL="73152" marR="73152">
                     <a:lnL w="9525" cap="flat" cmpd="sng" algn="ctr">
                       <a:solidFill>
-                        <a:srgbClr val="F5E9CC"/>
+                        <a:srgbClr val="F7EDD4"/>
                       </a:solidFill>
                       <a:prstDash val="solid"/>
                     </a:lnL>
                     <a:lnR w="9525" cap="flat" cmpd="sng" algn="ctr">
                       <a:solidFill>
-                        <a:srgbClr val="F5E9CC"/>
+                        <a:srgbClr val="F7EDD4"/>
                       </a:solidFill>
                       <a:prstDash val="solid"/>
                     </a:lnR>
                     <a:lnT w="9525" cap="flat" cmpd="sng" algn="ctr">
                       <a:solidFill>
-                        <a:srgbClr val="F5E9CC"/>
+                        <a:srgbClr val="F7EDD4"/>
                       </a:solidFill>
                       <a:prstDash val="solid"/>
                     </a:lnT>
                     <a:lnB w="9525" cap="flat" cmpd="sng" algn="ctr">
                       <a:solidFill>
-                        <a:srgbClr val="F5E9CC"/>
+                        <a:srgbClr val="F7EDD4"/>
                       </a:solidFill>
                       <a:prstDash val="solid"/>
                     </a:lnB>
                     <a:solidFill>
-                      <a:srgbClr val="FBF7EE"/>
+                      <a:srgbClr val="FCF9F3"/>
                     </a:solidFill>
                   </a:tcPr>
                 </a:tc>
@@ -7908,7 +7908,7 @@
     <p:bg>
       <p:bgPr>
         <a:solidFill>
-          <a:srgbClr val="FBF7EE"/>
+          <a:srgbClr val="FCF9F3"/>
         </a:solidFill>
         <a:effectLst/>
       </p:bgPr>
@@ -7937,7 +7937,7 @@
           <a:noFill/>
           <a:ln w="28575">
             <a:solidFill>
-              <a:srgbClr val="C6992F"/>
+              <a:srgbClr val="DFAD3A"/>
             </a:solidFill>
           </a:ln>
         </p:spPr>
@@ -7966,7 +7966,7 @@
           <a:noFill/>
           <a:ln w="9525">
             <a:solidFill>
-              <a:srgbClr val="F5E9CC"/>
+              <a:srgbClr val="F7EDD4"/>
             </a:solidFill>
           </a:ln>
         </p:spPr>
@@ -8008,7 +8008,7 @@
             <a:r>
               <a:rPr sz="3000" b="1" i="0">
                 <a:solidFill>
-                  <a:srgbClr val="74591B"/>
+                  <a:srgbClr val="72591D"/>
                 </a:solidFill>
               </a:rPr>
               <a:t>월 보험료 한눈에</a:t>
@@ -8033,11 +8033,11 @@
             </a:avLst>
           </a:prstGeom>
           <a:solidFill>
-            <a:srgbClr val="FBF7EE"/>
+            <a:srgbClr val="FCF9F3"/>
           </a:solidFill>
           <a:ln w="15875">
             <a:solidFill>
-              <a:srgbClr val="F5E9CC"/>
+              <a:srgbClr val="F7EDD4"/>
             </a:solidFill>
           </a:ln>
         </p:spPr>
@@ -8064,7 +8064,7 @@
             <a:avLst/>
           </a:prstGeom>
           <a:solidFill>
-            <a:srgbClr val="C6992F"/>
+            <a:srgbClr val="DFAD3A"/>
           </a:solidFill>
           <a:ln>
             <a:noFill/>
@@ -8122,7 +8122,7 @@
             <a:r>
               <a:rPr sz="1700" b="1" i="0">
                 <a:solidFill>
-                  <a:srgbClr val="74591B"/>
+                  <a:srgbClr val="72591D"/>
                 </a:solidFill>
               </a:rPr>
               <a:t>월 보험료 합계</a:t>
@@ -8185,11 +8185,11 @@
             </a:avLst>
           </a:prstGeom>
           <a:solidFill>
-            <a:srgbClr val="FBF7EE"/>
+            <a:srgbClr val="FCF9F3"/>
           </a:solidFill>
           <a:ln w="15875">
             <a:solidFill>
-              <a:srgbClr val="F5E9CC"/>
+              <a:srgbClr val="F7EDD4"/>
             </a:solidFill>
           </a:ln>
         </p:spPr>
@@ -8216,7 +8216,7 @@
             <a:avLst/>
           </a:prstGeom>
           <a:solidFill>
-            <a:srgbClr val="C6992F"/>
+            <a:srgbClr val="DFAD3A"/>
           </a:solidFill>
           <a:ln>
             <a:noFill/>
@@ -8274,7 +8274,7 @@
             <a:r>
               <a:rPr sz="1700" b="1" i="0">
                 <a:solidFill>
-                  <a:srgbClr val="74591B"/>
+                  <a:srgbClr val="72591D"/>
                 </a:solidFill>
               </a:rPr>
               <a:t>연 보험료 합계</a:t>
@@ -8337,11 +8337,11 @@
             </a:avLst>
           </a:prstGeom>
           <a:solidFill>
-            <a:srgbClr val="FBF7EE"/>
+            <a:srgbClr val="FCF9F3"/>
           </a:solidFill>
           <a:ln w="15875">
             <a:solidFill>
-              <a:srgbClr val="F5E9CC"/>
+              <a:srgbClr val="F7EDD4"/>
             </a:solidFill>
           </a:ln>
         </p:spPr>
@@ -8368,7 +8368,7 @@
             <a:avLst/>
           </a:prstGeom>
           <a:solidFill>
-            <a:srgbClr val="C6992F"/>
+            <a:srgbClr val="DFAD3A"/>
           </a:solidFill>
           <a:ln>
             <a:noFill/>
@@ -8426,7 +8426,7 @@
             <a:r>
               <a:rPr sz="1700" b="1" i="0">
                 <a:solidFill>
-                  <a:srgbClr val="74591B"/>
+                  <a:srgbClr val="72591D"/>
                 </a:solidFill>
               </a:rPr>
               <a:t>월 소득 대비</a:t>
@@ -8524,7 +8524,7 @@
     <p:bg>
       <p:bgPr>
         <a:solidFill>
-          <a:srgbClr val="FBF7EE"/>
+          <a:srgbClr val="FCF9F3"/>
         </a:solidFill>
         <a:effectLst/>
       </p:bgPr>
@@ -8553,7 +8553,7 @@
           <a:noFill/>
           <a:ln w="28575">
             <a:solidFill>
-              <a:srgbClr val="C6992F"/>
+              <a:srgbClr val="DFAD3A"/>
             </a:solidFill>
           </a:ln>
         </p:spPr>
@@ -8582,7 +8582,7 @@
           <a:noFill/>
           <a:ln w="9525">
             <a:solidFill>
-              <a:srgbClr val="F5E9CC"/>
+              <a:srgbClr val="F7EDD4"/>
             </a:solidFill>
           </a:ln>
         </p:spPr>
@@ -8624,7 +8624,7 @@
             <a:r>
               <a:rPr sz="3000" b="1" i="0">
                 <a:solidFill>
-                  <a:srgbClr val="74591B"/>
+                  <a:srgbClr val="72591D"/>
                 </a:solidFill>
               </a:rPr>
               <a:t>점검 메모와 다음 할 일</a:t>
@@ -8649,11 +8649,11 @@
             </a:avLst>
           </a:prstGeom>
           <a:solidFill>
-            <a:srgbClr val="FBF7EE"/>
+            <a:srgbClr val="FCF9F3"/>
           </a:solidFill>
           <a:ln w="15875">
             <a:solidFill>
-              <a:srgbClr val="F5E9CC"/>
+              <a:srgbClr val="F7EDD4"/>
             </a:solidFill>
           </a:ln>
         </p:spPr>
@@ -8680,7 +8680,7 @@
             <a:avLst/>
           </a:prstGeom>
           <a:solidFill>
-            <a:srgbClr val="C6992F"/>
+            <a:srgbClr val="DFAD3A"/>
           </a:solidFill>
           <a:ln>
             <a:noFill/>
@@ -8738,7 +8738,7 @@
             <a:r>
               <a:rPr sz="1800" b="1" i="0">
                 <a:solidFill>
-                  <a:srgbClr val="74591B"/>
+                  <a:srgbClr val="72591D"/>
                 </a:solidFill>
               </a:rPr>
               <a:t>확인할 것</a:t>
@@ -8801,11 +8801,11 @@
             </a:avLst>
           </a:prstGeom>
           <a:solidFill>
-            <a:srgbClr val="FBF7EE"/>
+            <a:srgbClr val="FCF9F3"/>
           </a:solidFill>
           <a:ln w="15875">
             <a:solidFill>
-              <a:srgbClr val="F5E9CC"/>
+              <a:srgbClr val="F7EDD4"/>
             </a:solidFill>
           </a:ln>
         </p:spPr>
@@ -8832,7 +8832,7 @@
             <a:avLst/>
           </a:prstGeom>
           <a:solidFill>
-            <a:srgbClr val="C6992F"/>
+            <a:srgbClr val="DFAD3A"/>
           </a:solidFill>
           <a:ln>
             <a:noFill/>
@@ -8890,7 +8890,7 @@
             <a:r>
               <a:rPr sz="1800" b="1" i="0">
                 <a:solidFill>
-                  <a:srgbClr val="74591B"/>
+                  <a:srgbClr val="72591D"/>
                 </a:solidFill>
               </a:rPr>
               <a:t>문의할 것</a:t>
@@ -8953,11 +8953,11 @@
             </a:avLst>
           </a:prstGeom>
           <a:solidFill>
-            <a:srgbClr val="FBF7EE"/>
+            <a:srgbClr val="FCF9F3"/>
           </a:solidFill>
           <a:ln w="15875">
             <a:solidFill>
-              <a:srgbClr val="F5E9CC"/>
+              <a:srgbClr val="F7EDD4"/>
             </a:solidFill>
           </a:ln>
         </p:spPr>
@@ -8984,7 +8984,7 @@
             <a:avLst/>
           </a:prstGeom>
           <a:solidFill>
-            <a:srgbClr val="C6992F"/>
+            <a:srgbClr val="DFAD3A"/>
           </a:solidFill>
           <a:ln>
             <a:noFill/>
@@ -9042,7 +9042,7 @@
             <a:r>
               <a:rPr sz="1800" b="1" i="0">
                 <a:solidFill>
-                  <a:srgbClr val="74591B"/>
+                  <a:srgbClr val="72591D"/>
                 </a:solidFill>
               </a:rPr>
               <a:t>정리할 날짜</a:t>
@@ -9145,34 +9145,34 @@
         <a:sysClr val="window" lastClr="FFFFFF"/>
       </a:lt1>
       <a:dk2>
-        <a:srgbClr val="74591B"/>
+        <a:srgbClr val="72591D"/>
       </a:dk2>
       <a:lt2>
-        <a:srgbClr val="FBF7EE"/>
+        <a:srgbClr val="FCF9F3"/>
       </a:lt2>
       <a:accent1>
-        <a:srgbClr val="C6992F"/>
+        <a:srgbClr val="DFAD3A"/>
       </a:accent1>
       <a:accent2>
-        <a:srgbClr val="3B8091"/>
+        <a:srgbClr val="339941"/>
       </a:accent2>
       <a:accent3>
-        <a:srgbClr val="74591B"/>
+        <a:srgbClr val="72591D"/>
       </a:accent3>
       <a:accent4>
-        <a:srgbClr val="F5E9CC"/>
+        <a:srgbClr val="F7EDD4"/>
       </a:accent4>
       <a:accent5>
-        <a:srgbClr val="808C60"/>
+        <a:srgbClr val="89A33E"/>
       </a:accent5>
       <a:accent6>
-        <a:srgbClr val="AC9B76"/>
+        <a:srgbClr val="AA9B77"/>
       </a:accent6>
       <a:hlink>
-        <a:srgbClr val="C6992F"/>
+        <a:srgbClr val="DFAD3A"/>
       </a:hlink>
       <a:folHlink>
-        <a:srgbClr val="74591B"/>
+        <a:srgbClr val="72591D"/>
       </a:folHlink>
     </a:clrScheme>
     <a:fontScheme name="Office">
